--- a/presentations/MovieTracker_Lecture_01.pptx
+++ b/presentations/MovieTracker_Lecture_01.pptx
@@ -2,7 +2,7 @@
 <file path=ppt/presentation.xml><?xml version="1.0" encoding="utf-8"?>
 <p:presentation xmlns:a="http://schemas.openxmlformats.org/drawingml/2006/main" xmlns:r="http://schemas.openxmlformats.org/officeDocument/2006/relationships" xmlns:p="http://schemas.openxmlformats.org/presentationml/2006/main" saveSubsetFonts="1" autoCompressPictures="0">
   <p:sldMasterIdLst>
-    <p:sldMasterId id="2147483648" r:id="rId1"/>
+    <p:sldMasterId id="2147483660" r:id="rId1"/>
   </p:sldMasterIdLst>
   <p:notesMasterIdLst>
     <p:notesMasterId r:id="rId29"/>
@@ -42,7 +42,7 @@
     <a:defPPr>
       <a:defRPr lang="en-US"/>
     </a:defPPr>
-    <a:lvl1pPr marL="0" algn="l" defTabSz="457200" rtl="0" eaLnBrk="1" latinLnBrk="0" hangingPunct="1">
+    <a:lvl1pPr marL="0" algn="l" defTabSz="914400" rtl="0" eaLnBrk="1" latinLnBrk="0" hangingPunct="1">
       <a:defRPr sz="1800" kern="1200">
         <a:solidFill>
           <a:schemeClr val="tx1"/>
@@ -52,7 +52,7 @@
         <a:cs typeface="+mn-cs"/>
       </a:defRPr>
     </a:lvl1pPr>
-    <a:lvl2pPr marL="457200" algn="l" defTabSz="457200" rtl="0" eaLnBrk="1" latinLnBrk="0" hangingPunct="1">
+    <a:lvl2pPr marL="457200" algn="l" defTabSz="914400" rtl="0" eaLnBrk="1" latinLnBrk="0" hangingPunct="1">
       <a:defRPr sz="1800" kern="1200">
         <a:solidFill>
           <a:schemeClr val="tx1"/>
@@ -62,7 +62,7 @@
         <a:cs typeface="+mn-cs"/>
       </a:defRPr>
     </a:lvl2pPr>
-    <a:lvl3pPr marL="914400" algn="l" defTabSz="457200" rtl="0" eaLnBrk="1" latinLnBrk="0" hangingPunct="1">
+    <a:lvl3pPr marL="914400" algn="l" defTabSz="914400" rtl="0" eaLnBrk="1" latinLnBrk="0" hangingPunct="1">
       <a:defRPr sz="1800" kern="1200">
         <a:solidFill>
           <a:schemeClr val="tx1"/>
@@ -72,7 +72,7 @@
         <a:cs typeface="+mn-cs"/>
       </a:defRPr>
     </a:lvl3pPr>
-    <a:lvl4pPr marL="1371600" algn="l" defTabSz="457200" rtl="0" eaLnBrk="1" latinLnBrk="0" hangingPunct="1">
+    <a:lvl4pPr marL="1371600" algn="l" defTabSz="914400" rtl="0" eaLnBrk="1" latinLnBrk="0" hangingPunct="1">
       <a:defRPr sz="1800" kern="1200">
         <a:solidFill>
           <a:schemeClr val="tx1"/>
@@ -82,7 +82,7 @@
         <a:cs typeface="+mn-cs"/>
       </a:defRPr>
     </a:lvl4pPr>
-    <a:lvl5pPr marL="1828800" algn="l" defTabSz="457200" rtl="0" eaLnBrk="1" latinLnBrk="0" hangingPunct="1">
+    <a:lvl5pPr marL="1828800" algn="l" defTabSz="914400" rtl="0" eaLnBrk="1" latinLnBrk="0" hangingPunct="1">
       <a:defRPr sz="1800" kern="1200">
         <a:solidFill>
           <a:schemeClr val="tx1"/>
@@ -92,7 +92,7 @@
         <a:cs typeface="+mn-cs"/>
       </a:defRPr>
     </a:lvl5pPr>
-    <a:lvl6pPr marL="2286000" algn="l" defTabSz="457200" rtl="0" eaLnBrk="1" latinLnBrk="0" hangingPunct="1">
+    <a:lvl6pPr marL="2286000" algn="l" defTabSz="914400" rtl="0" eaLnBrk="1" latinLnBrk="0" hangingPunct="1">
       <a:defRPr sz="1800" kern="1200">
         <a:solidFill>
           <a:schemeClr val="tx1"/>
@@ -102,7 +102,7 @@
         <a:cs typeface="+mn-cs"/>
       </a:defRPr>
     </a:lvl6pPr>
-    <a:lvl7pPr marL="2743200" algn="l" defTabSz="457200" rtl="0" eaLnBrk="1" latinLnBrk="0" hangingPunct="1">
+    <a:lvl7pPr marL="2743200" algn="l" defTabSz="914400" rtl="0" eaLnBrk="1" latinLnBrk="0" hangingPunct="1">
       <a:defRPr sz="1800" kern="1200">
         <a:solidFill>
           <a:schemeClr val="tx1"/>
@@ -112,7 +112,7 @@
         <a:cs typeface="+mn-cs"/>
       </a:defRPr>
     </a:lvl7pPr>
-    <a:lvl8pPr marL="3200400" algn="l" defTabSz="457200" rtl="0" eaLnBrk="1" latinLnBrk="0" hangingPunct="1">
+    <a:lvl8pPr marL="3200400" algn="l" defTabSz="914400" rtl="0" eaLnBrk="1" latinLnBrk="0" hangingPunct="1">
       <a:defRPr sz="1800" kern="1200">
         <a:solidFill>
           <a:schemeClr val="tx1"/>
@@ -122,7 +122,7 @@
         <a:cs typeface="+mn-cs"/>
       </a:defRPr>
     </a:lvl8pPr>
-    <a:lvl9pPr marL="3657600" algn="l" defTabSz="457200" rtl="0" eaLnBrk="1" latinLnBrk="0" hangingPunct="1">
+    <a:lvl9pPr marL="3657600" algn="l" defTabSz="914400" rtl="0" eaLnBrk="1" latinLnBrk="0" hangingPunct="1">
       <a:defRPr sz="1800" kern="1200">
         <a:solidFill>
           <a:schemeClr val="tx1"/>
@@ -2392,7 +2392,13 @@
       </p:grpSpPr>
       <p:sp>
         <p:nvSpPr>
-          <p:cNvPr id="2" name="Title 1"/>
+          <p:cNvPr id="2" name="Title 1">
+            <a:extLst>
+              <a:ext uri="{FF2B5EF4-FFF2-40B4-BE49-F238E27FC236}">
+                <a16:creationId xmlns:a16="http://schemas.microsoft.com/office/drawing/2014/main" id="{8DC5207B-A834-0BAC-E030-BC8D2B5BCBF1}"/>
+              </a:ext>
+            </a:extLst>
+          </p:cNvPr>
           <p:cNvSpPr>
             <a:spLocks noGrp="1"/>
           </p:cNvSpPr>
@@ -2402,13 +2408,17 @@
         </p:nvSpPr>
         <p:spPr>
           <a:xfrm>
-            <a:off x="685800" y="2130425"/>
-            <a:ext cx="7772400" cy="1470025"/>
-          </a:xfrm>
-        </p:spPr>
-        <p:txBody>
-          <a:bodyPr/>
-          <a:lstStyle/>
+            <a:off x="1524000" y="1122363"/>
+            <a:ext cx="9144000" cy="2387600"/>
+          </a:xfrm>
+        </p:spPr>
+        <p:txBody>
+          <a:bodyPr anchor="b"/>
+          <a:lstStyle>
+            <a:lvl1pPr algn="ctr">
+              <a:defRPr sz="6000"/>
+            </a:lvl1pPr>
+          </a:lstStyle>
           <a:p>
             <a:r>
               <a:rPr lang="en-US"/>
@@ -2419,7 +2429,13 @@
       </p:sp>
       <p:sp>
         <p:nvSpPr>
-          <p:cNvPr id="3" name="Subtitle 2"/>
+          <p:cNvPr id="3" name="Subtitle 2">
+            <a:extLst>
+              <a:ext uri="{FF2B5EF4-FFF2-40B4-BE49-F238E27FC236}">
+                <a16:creationId xmlns:a16="http://schemas.microsoft.com/office/drawing/2014/main" id="{27D4EBCA-B5D8-0D5A-1592-AA5C66863B5F}"/>
+              </a:ext>
+            </a:extLst>
+          </p:cNvPr>
           <p:cNvSpPr>
             <a:spLocks noGrp="1"/>
           </p:cNvSpPr>
@@ -2429,8 +2445,8 @@
         </p:nvSpPr>
         <p:spPr>
           <a:xfrm>
-            <a:off x="1371600" y="3886200"/>
-            <a:ext cx="6400800" cy="1752600"/>
+            <a:off x="1524000" y="3602038"/>
+            <a:ext cx="9144000" cy="1655762"/>
           </a:xfrm>
         </p:spPr>
         <p:txBody>
@@ -2438,93 +2454,39 @@
           <a:lstStyle>
             <a:lvl1pPr marL="0" indent="0" algn="ctr">
               <a:buNone/>
-              <a:defRPr>
-                <a:solidFill>
-                  <a:schemeClr val="tx1">
-                    <a:tint val="75000"/>
-                  </a:schemeClr>
-                </a:solidFill>
-              </a:defRPr>
+              <a:defRPr sz="2400"/>
             </a:lvl1pPr>
             <a:lvl2pPr marL="457200" indent="0" algn="ctr">
               <a:buNone/>
-              <a:defRPr>
-                <a:solidFill>
-                  <a:schemeClr val="tx1">
-                    <a:tint val="75000"/>
-                  </a:schemeClr>
-                </a:solidFill>
-              </a:defRPr>
+              <a:defRPr sz="2000"/>
             </a:lvl2pPr>
             <a:lvl3pPr marL="914400" indent="0" algn="ctr">
               <a:buNone/>
-              <a:defRPr>
-                <a:solidFill>
-                  <a:schemeClr val="tx1">
-                    <a:tint val="75000"/>
-                  </a:schemeClr>
-                </a:solidFill>
-              </a:defRPr>
+              <a:defRPr sz="1800"/>
             </a:lvl3pPr>
             <a:lvl4pPr marL="1371600" indent="0" algn="ctr">
               <a:buNone/>
-              <a:defRPr>
-                <a:solidFill>
-                  <a:schemeClr val="tx1">
-                    <a:tint val="75000"/>
-                  </a:schemeClr>
-                </a:solidFill>
-              </a:defRPr>
+              <a:defRPr sz="1600"/>
             </a:lvl4pPr>
             <a:lvl5pPr marL="1828800" indent="0" algn="ctr">
               <a:buNone/>
-              <a:defRPr>
-                <a:solidFill>
-                  <a:schemeClr val="tx1">
-                    <a:tint val="75000"/>
-                  </a:schemeClr>
-                </a:solidFill>
-              </a:defRPr>
+              <a:defRPr sz="1600"/>
             </a:lvl5pPr>
             <a:lvl6pPr marL="2286000" indent="0" algn="ctr">
               <a:buNone/>
-              <a:defRPr>
-                <a:solidFill>
-                  <a:schemeClr val="tx1">
-                    <a:tint val="75000"/>
-                  </a:schemeClr>
-                </a:solidFill>
-              </a:defRPr>
+              <a:defRPr sz="1600"/>
             </a:lvl6pPr>
             <a:lvl7pPr marL="2743200" indent="0" algn="ctr">
               <a:buNone/>
-              <a:defRPr>
-                <a:solidFill>
-                  <a:schemeClr val="tx1">
-                    <a:tint val="75000"/>
-                  </a:schemeClr>
-                </a:solidFill>
-              </a:defRPr>
+              <a:defRPr sz="1600"/>
             </a:lvl7pPr>
             <a:lvl8pPr marL="3200400" indent="0" algn="ctr">
               <a:buNone/>
-              <a:defRPr>
-                <a:solidFill>
-                  <a:schemeClr val="tx1">
-                    <a:tint val="75000"/>
-                  </a:schemeClr>
-                </a:solidFill>
-              </a:defRPr>
+              <a:defRPr sz="1600"/>
             </a:lvl8pPr>
             <a:lvl9pPr marL="3657600" indent="0" algn="ctr">
               <a:buNone/>
-              <a:defRPr>
-                <a:solidFill>
-                  <a:schemeClr val="tx1">
-                    <a:tint val="75000"/>
-                  </a:schemeClr>
-                </a:solidFill>
-              </a:defRPr>
+              <a:defRPr sz="1600"/>
             </a:lvl9pPr>
           </a:lstStyle>
           <a:p>
@@ -2537,7 +2499,13 @@
       </p:sp>
       <p:sp>
         <p:nvSpPr>
-          <p:cNvPr id="4" name="Date Placeholder 3"/>
+          <p:cNvPr id="4" name="Date Placeholder 3">
+            <a:extLst>
+              <a:ext uri="{FF2B5EF4-FFF2-40B4-BE49-F238E27FC236}">
+                <a16:creationId xmlns:a16="http://schemas.microsoft.com/office/drawing/2014/main" id="{2D0229E5-2A0E-622F-3828-259592B661DA}"/>
+              </a:ext>
+            </a:extLst>
+          </p:cNvPr>
           <p:cNvSpPr>
             <a:spLocks noGrp="1"/>
           </p:cNvSpPr>
@@ -2552,7 +2520,7 @@
           <a:p>
             <a:fld id="{5BCAD085-E8A6-8845-BD4E-CB4CCA059FC4}" type="datetimeFigureOut">
               <a:rPr lang="en-US" smtClean="0"/>
-              <a:t>9/23/2026</a:t>
+              <a:t>9/25/2026</a:t>
             </a:fld>
             <a:endParaRPr lang="en-US"/>
           </a:p>
@@ -2560,7 +2528,13 @@
       </p:sp>
       <p:sp>
         <p:nvSpPr>
-          <p:cNvPr id="5" name="Footer Placeholder 4"/>
+          <p:cNvPr id="5" name="Footer Placeholder 4">
+            <a:extLst>
+              <a:ext uri="{FF2B5EF4-FFF2-40B4-BE49-F238E27FC236}">
+                <a16:creationId xmlns:a16="http://schemas.microsoft.com/office/drawing/2014/main" id="{1184BAE1-F849-BFAA-7E0A-FA4F4BFD1714}"/>
+              </a:ext>
+            </a:extLst>
+          </p:cNvPr>
           <p:cNvSpPr>
             <a:spLocks noGrp="1"/>
           </p:cNvSpPr>
@@ -2579,7 +2553,13 @@
       </p:sp>
       <p:sp>
         <p:nvSpPr>
-          <p:cNvPr id="6" name="Slide Number Placeholder 5"/>
+          <p:cNvPr id="6" name="Slide Number Placeholder 5">
+            <a:extLst>
+              <a:ext uri="{FF2B5EF4-FFF2-40B4-BE49-F238E27FC236}">
+                <a16:creationId xmlns:a16="http://schemas.microsoft.com/office/drawing/2014/main" id="{B945CFD8-B221-18DD-E8D4-C186F48FB3CD}"/>
+              </a:ext>
+            </a:extLst>
+          </p:cNvPr>
           <p:cNvSpPr>
             <a:spLocks noGrp="1"/>
           </p:cNvSpPr>
@@ -2603,7 +2583,7 @@
     </p:spTree>
     <p:extLst>
       <p:ext uri="{BB962C8B-B14F-4D97-AF65-F5344CB8AC3E}">
-        <p14:creationId xmlns:p14="http://schemas.microsoft.com/office/powerpoint/2010/main" val="3168075583"/>
+        <p14:creationId xmlns:p14="http://schemas.microsoft.com/office/powerpoint/2010/main" val="3360135401"/>
       </p:ext>
     </p:extLst>
   </p:cSld>
@@ -2632,7 +2612,13 @@
       </p:grpSpPr>
       <p:sp>
         <p:nvSpPr>
-          <p:cNvPr id="2" name="Title 1"/>
+          <p:cNvPr id="2" name="Title 1">
+            <a:extLst>
+              <a:ext uri="{FF2B5EF4-FFF2-40B4-BE49-F238E27FC236}">
+                <a16:creationId xmlns:a16="http://schemas.microsoft.com/office/drawing/2014/main" id="{3FB9C971-C132-F937-5E46-3162A2E2A2D9}"/>
+              </a:ext>
+            </a:extLst>
+          </p:cNvPr>
           <p:cNvSpPr>
             <a:spLocks noGrp="1"/>
           </p:cNvSpPr>
@@ -2654,7 +2640,13 @@
       </p:sp>
       <p:sp>
         <p:nvSpPr>
-          <p:cNvPr id="3" name="Vertical Text Placeholder 2"/>
+          <p:cNvPr id="3" name="Vertical Text Placeholder 2">
+            <a:extLst>
+              <a:ext uri="{FF2B5EF4-FFF2-40B4-BE49-F238E27FC236}">
+                <a16:creationId xmlns:a16="http://schemas.microsoft.com/office/drawing/2014/main" id="{9D99E9E5-1468-0855-4501-2C826B3CCB9D}"/>
+              </a:ext>
+            </a:extLst>
+          </p:cNvPr>
           <p:cNvSpPr>
             <a:spLocks noGrp="1"/>
           </p:cNvSpPr>
@@ -2705,7 +2697,13 @@
       </p:sp>
       <p:sp>
         <p:nvSpPr>
-          <p:cNvPr id="4" name="Date Placeholder 3"/>
+          <p:cNvPr id="4" name="Date Placeholder 3">
+            <a:extLst>
+              <a:ext uri="{FF2B5EF4-FFF2-40B4-BE49-F238E27FC236}">
+                <a16:creationId xmlns:a16="http://schemas.microsoft.com/office/drawing/2014/main" id="{45ABE442-FBAF-2865-8737-30D93A9B7A67}"/>
+              </a:ext>
+            </a:extLst>
+          </p:cNvPr>
           <p:cNvSpPr>
             <a:spLocks noGrp="1"/>
           </p:cNvSpPr>
@@ -2720,7 +2718,7 @@
           <a:p>
             <a:fld id="{5BCAD085-E8A6-8845-BD4E-CB4CCA059FC4}" type="datetimeFigureOut">
               <a:rPr lang="en-US" smtClean="0"/>
-              <a:t>9/23/2026</a:t>
+              <a:t>9/25/2026</a:t>
             </a:fld>
             <a:endParaRPr lang="en-US"/>
           </a:p>
@@ -2728,7 +2726,13 @@
       </p:sp>
       <p:sp>
         <p:nvSpPr>
-          <p:cNvPr id="5" name="Footer Placeholder 4"/>
+          <p:cNvPr id="5" name="Footer Placeholder 4">
+            <a:extLst>
+              <a:ext uri="{FF2B5EF4-FFF2-40B4-BE49-F238E27FC236}">
+                <a16:creationId xmlns:a16="http://schemas.microsoft.com/office/drawing/2014/main" id="{75D23468-DB2E-DFE0-5BFD-35B0D82E259A}"/>
+              </a:ext>
+            </a:extLst>
+          </p:cNvPr>
           <p:cNvSpPr>
             <a:spLocks noGrp="1"/>
           </p:cNvSpPr>
@@ -2747,7 +2751,13 @@
       </p:sp>
       <p:sp>
         <p:nvSpPr>
-          <p:cNvPr id="6" name="Slide Number Placeholder 5"/>
+          <p:cNvPr id="6" name="Slide Number Placeholder 5">
+            <a:extLst>
+              <a:ext uri="{FF2B5EF4-FFF2-40B4-BE49-F238E27FC236}">
+                <a16:creationId xmlns:a16="http://schemas.microsoft.com/office/drawing/2014/main" id="{EC7EAFBC-EA28-CA1A-C015-BC5856F04A81}"/>
+              </a:ext>
+            </a:extLst>
+          </p:cNvPr>
           <p:cNvSpPr>
             <a:spLocks noGrp="1"/>
           </p:cNvSpPr>
@@ -2771,7 +2781,7 @@
     </p:spTree>
     <p:extLst>
       <p:ext uri="{BB962C8B-B14F-4D97-AF65-F5344CB8AC3E}">
-        <p14:creationId xmlns:p14="http://schemas.microsoft.com/office/powerpoint/2010/main" val="2910927964"/>
+        <p14:creationId xmlns:p14="http://schemas.microsoft.com/office/powerpoint/2010/main" val="79593659"/>
       </p:ext>
     </p:extLst>
   </p:cSld>
@@ -2800,7 +2810,13 @@
       </p:grpSpPr>
       <p:sp>
         <p:nvSpPr>
-          <p:cNvPr id="2" name="Vertical Title 1"/>
+          <p:cNvPr id="2" name="Vertical Title 1">
+            <a:extLst>
+              <a:ext uri="{FF2B5EF4-FFF2-40B4-BE49-F238E27FC236}">
+                <a16:creationId xmlns:a16="http://schemas.microsoft.com/office/drawing/2014/main" id="{E4163733-3F44-24B6-87F2-4B649346AA8E}"/>
+              </a:ext>
+            </a:extLst>
+          </p:cNvPr>
           <p:cNvSpPr>
             <a:spLocks noGrp="1"/>
           </p:cNvSpPr>
@@ -2810,8 +2826,8 @@
         </p:nvSpPr>
         <p:spPr>
           <a:xfrm>
-            <a:off x="6629400" y="274638"/>
-            <a:ext cx="2057400" cy="5851525"/>
+            <a:off x="8724900" y="365125"/>
+            <a:ext cx="2628900" cy="5811838"/>
           </a:xfrm>
         </p:spPr>
         <p:txBody>
@@ -2827,7 +2843,13 @@
       </p:sp>
       <p:sp>
         <p:nvSpPr>
-          <p:cNvPr id="3" name="Vertical Text Placeholder 2"/>
+          <p:cNvPr id="3" name="Vertical Text Placeholder 2">
+            <a:extLst>
+              <a:ext uri="{FF2B5EF4-FFF2-40B4-BE49-F238E27FC236}">
+                <a16:creationId xmlns:a16="http://schemas.microsoft.com/office/drawing/2014/main" id="{8D349607-01AA-6D10-2257-D3F2A0992750}"/>
+              </a:ext>
+            </a:extLst>
+          </p:cNvPr>
           <p:cNvSpPr>
             <a:spLocks noGrp="1"/>
           </p:cNvSpPr>
@@ -2837,8 +2859,8 @@
         </p:nvSpPr>
         <p:spPr>
           <a:xfrm>
-            <a:off x="457200" y="274638"/>
-            <a:ext cx="6019800" cy="5851525"/>
+            <a:off x="838200" y="365125"/>
+            <a:ext cx="7734300" cy="5811838"/>
           </a:xfrm>
         </p:spPr>
         <p:txBody>
@@ -2883,7 +2905,13 @@
       </p:sp>
       <p:sp>
         <p:nvSpPr>
-          <p:cNvPr id="4" name="Date Placeholder 3"/>
+          <p:cNvPr id="4" name="Date Placeholder 3">
+            <a:extLst>
+              <a:ext uri="{FF2B5EF4-FFF2-40B4-BE49-F238E27FC236}">
+                <a16:creationId xmlns:a16="http://schemas.microsoft.com/office/drawing/2014/main" id="{E1BDC7F1-D82A-98EE-1CAF-AA301E67DCDD}"/>
+              </a:ext>
+            </a:extLst>
+          </p:cNvPr>
           <p:cNvSpPr>
             <a:spLocks noGrp="1"/>
           </p:cNvSpPr>
@@ -2898,7 +2926,7 @@
           <a:p>
             <a:fld id="{5BCAD085-E8A6-8845-BD4E-CB4CCA059FC4}" type="datetimeFigureOut">
               <a:rPr lang="en-US" smtClean="0"/>
-              <a:t>9/23/2026</a:t>
+              <a:t>9/25/2026</a:t>
             </a:fld>
             <a:endParaRPr lang="en-US"/>
           </a:p>
@@ -2906,7 +2934,13 @@
       </p:sp>
       <p:sp>
         <p:nvSpPr>
-          <p:cNvPr id="5" name="Footer Placeholder 4"/>
+          <p:cNvPr id="5" name="Footer Placeholder 4">
+            <a:extLst>
+              <a:ext uri="{FF2B5EF4-FFF2-40B4-BE49-F238E27FC236}">
+                <a16:creationId xmlns:a16="http://schemas.microsoft.com/office/drawing/2014/main" id="{EFED5355-A1F1-D2DA-BAA3-83B8974FCD68}"/>
+              </a:ext>
+            </a:extLst>
+          </p:cNvPr>
           <p:cNvSpPr>
             <a:spLocks noGrp="1"/>
           </p:cNvSpPr>
@@ -2925,7 +2959,13 @@
       </p:sp>
       <p:sp>
         <p:nvSpPr>
-          <p:cNvPr id="6" name="Slide Number Placeholder 5"/>
+          <p:cNvPr id="6" name="Slide Number Placeholder 5">
+            <a:extLst>
+              <a:ext uri="{FF2B5EF4-FFF2-40B4-BE49-F238E27FC236}">
+                <a16:creationId xmlns:a16="http://schemas.microsoft.com/office/drawing/2014/main" id="{BEC4928E-F978-47DA-65FD-8614E84B4D37}"/>
+              </a:ext>
+            </a:extLst>
+          </p:cNvPr>
           <p:cNvSpPr>
             <a:spLocks noGrp="1"/>
           </p:cNvSpPr>
@@ -2949,7 +2989,7 @@
     </p:spTree>
     <p:extLst>
       <p:ext uri="{BB962C8B-B14F-4D97-AF65-F5344CB8AC3E}">
-        <p14:creationId xmlns:p14="http://schemas.microsoft.com/office/powerpoint/2010/main" val="3612223792"/>
+        <p14:creationId xmlns:p14="http://schemas.microsoft.com/office/powerpoint/2010/main" val="631577863"/>
       </p:ext>
     </p:extLst>
   </p:cSld>
@@ -2978,7 +3018,13 @@
       </p:grpSpPr>
       <p:sp>
         <p:nvSpPr>
-          <p:cNvPr id="2" name="Title 1"/>
+          <p:cNvPr id="2" name="Title 1">
+            <a:extLst>
+              <a:ext uri="{FF2B5EF4-FFF2-40B4-BE49-F238E27FC236}">
+                <a16:creationId xmlns:a16="http://schemas.microsoft.com/office/drawing/2014/main" id="{A2A26097-D685-811B-AC91-76E9C1EE0286}"/>
+              </a:ext>
+            </a:extLst>
+          </p:cNvPr>
           <p:cNvSpPr>
             <a:spLocks noGrp="1"/>
           </p:cNvSpPr>
@@ -3000,7 +3046,13 @@
       </p:sp>
       <p:sp>
         <p:nvSpPr>
-          <p:cNvPr id="3" name="Content Placeholder 2"/>
+          <p:cNvPr id="3" name="Content Placeholder 2">
+            <a:extLst>
+              <a:ext uri="{FF2B5EF4-FFF2-40B4-BE49-F238E27FC236}">
+                <a16:creationId xmlns:a16="http://schemas.microsoft.com/office/drawing/2014/main" id="{8A150126-D8A9-7E72-8BB0-A466BDC46D2B}"/>
+              </a:ext>
+            </a:extLst>
+          </p:cNvPr>
           <p:cNvSpPr>
             <a:spLocks noGrp="1"/>
           </p:cNvSpPr>
@@ -3051,7 +3103,13 @@
       </p:sp>
       <p:sp>
         <p:nvSpPr>
-          <p:cNvPr id="4" name="Date Placeholder 3"/>
+          <p:cNvPr id="4" name="Date Placeholder 3">
+            <a:extLst>
+              <a:ext uri="{FF2B5EF4-FFF2-40B4-BE49-F238E27FC236}">
+                <a16:creationId xmlns:a16="http://schemas.microsoft.com/office/drawing/2014/main" id="{2E2C7EFD-D42A-3449-BEDA-07A59249A300}"/>
+              </a:ext>
+            </a:extLst>
+          </p:cNvPr>
           <p:cNvSpPr>
             <a:spLocks noGrp="1"/>
           </p:cNvSpPr>
@@ -3066,7 +3124,7 @@
           <a:p>
             <a:fld id="{5BCAD085-E8A6-8845-BD4E-CB4CCA059FC4}" type="datetimeFigureOut">
               <a:rPr lang="en-US" smtClean="0"/>
-              <a:t>9/23/2026</a:t>
+              <a:t>9/25/2026</a:t>
             </a:fld>
             <a:endParaRPr lang="en-US"/>
           </a:p>
@@ -3074,7 +3132,13 @@
       </p:sp>
       <p:sp>
         <p:nvSpPr>
-          <p:cNvPr id="5" name="Footer Placeholder 4"/>
+          <p:cNvPr id="5" name="Footer Placeholder 4">
+            <a:extLst>
+              <a:ext uri="{FF2B5EF4-FFF2-40B4-BE49-F238E27FC236}">
+                <a16:creationId xmlns:a16="http://schemas.microsoft.com/office/drawing/2014/main" id="{1E012466-EA80-021F-03A1-FE30FBB467E7}"/>
+              </a:ext>
+            </a:extLst>
+          </p:cNvPr>
           <p:cNvSpPr>
             <a:spLocks noGrp="1"/>
           </p:cNvSpPr>
@@ -3093,7 +3157,13 @@
       </p:sp>
       <p:sp>
         <p:nvSpPr>
-          <p:cNvPr id="6" name="Slide Number Placeholder 5"/>
+          <p:cNvPr id="6" name="Slide Number Placeholder 5">
+            <a:extLst>
+              <a:ext uri="{FF2B5EF4-FFF2-40B4-BE49-F238E27FC236}">
+                <a16:creationId xmlns:a16="http://schemas.microsoft.com/office/drawing/2014/main" id="{D7D5F233-07CC-8E28-3FD0-C273C0EAAE41}"/>
+              </a:ext>
+            </a:extLst>
+          </p:cNvPr>
           <p:cNvSpPr>
             <a:spLocks noGrp="1"/>
           </p:cNvSpPr>
@@ -3117,7 +3187,7 @@
     </p:spTree>
     <p:extLst>
       <p:ext uri="{BB962C8B-B14F-4D97-AF65-F5344CB8AC3E}">
-        <p14:creationId xmlns:p14="http://schemas.microsoft.com/office/powerpoint/2010/main" val="2614314258"/>
+        <p14:creationId xmlns:p14="http://schemas.microsoft.com/office/powerpoint/2010/main" val="1167961249"/>
       </p:ext>
     </p:extLst>
   </p:cSld>
@@ -3146,7 +3216,13 @@
       </p:grpSpPr>
       <p:sp>
         <p:nvSpPr>
-          <p:cNvPr id="2" name="Title 1"/>
+          <p:cNvPr id="2" name="Title 1">
+            <a:extLst>
+              <a:ext uri="{FF2B5EF4-FFF2-40B4-BE49-F238E27FC236}">
+                <a16:creationId xmlns:a16="http://schemas.microsoft.com/office/drawing/2014/main" id="{73C2EFB2-D901-4D4E-86B8-D02C8E74B3F2}"/>
+              </a:ext>
+            </a:extLst>
+          </p:cNvPr>
           <p:cNvSpPr>
             <a:spLocks noGrp="1"/>
           </p:cNvSpPr>
@@ -3156,15 +3232,15 @@
         </p:nvSpPr>
         <p:spPr>
           <a:xfrm>
-            <a:off x="722313" y="4406900"/>
-            <a:ext cx="7772400" cy="1362075"/>
-          </a:xfrm>
-        </p:spPr>
-        <p:txBody>
-          <a:bodyPr anchor="t"/>
+            <a:off x="831850" y="1709738"/>
+            <a:ext cx="10515600" cy="2852737"/>
+          </a:xfrm>
+        </p:spPr>
+        <p:txBody>
+          <a:bodyPr anchor="b"/>
           <a:lstStyle>
-            <a:lvl1pPr algn="l">
-              <a:defRPr sz="4000" b="1" cap="all"/>
+            <a:lvl1pPr>
+              <a:defRPr sz="6000"/>
             </a:lvl1pPr>
           </a:lstStyle>
           <a:p>
@@ -3177,7 +3253,13 @@
       </p:sp>
       <p:sp>
         <p:nvSpPr>
-          <p:cNvPr id="3" name="Text Placeholder 2"/>
+          <p:cNvPr id="3" name="Text Placeholder 2">
+            <a:extLst>
+              <a:ext uri="{FF2B5EF4-FFF2-40B4-BE49-F238E27FC236}">
+                <a16:creationId xmlns:a16="http://schemas.microsoft.com/office/drawing/2014/main" id="{4B0ABB13-2725-816C-1BA0-7BBFDBA50E4C}"/>
+              </a:ext>
+            </a:extLst>
+          </p:cNvPr>
           <p:cNvSpPr>
             <a:spLocks noGrp="1"/>
           </p:cNvSpPr>
@@ -3187,99 +3269,99 @@
         </p:nvSpPr>
         <p:spPr>
           <a:xfrm>
-            <a:off x="722313" y="2906713"/>
-            <a:ext cx="7772400" cy="1500187"/>
-          </a:xfrm>
-        </p:spPr>
-        <p:txBody>
-          <a:bodyPr anchor="b"/>
+            <a:off x="831850" y="4589463"/>
+            <a:ext cx="10515600" cy="1500187"/>
+          </a:xfrm>
+        </p:spPr>
+        <p:txBody>
+          <a:bodyPr/>
           <a:lstStyle>
             <a:lvl1pPr marL="0" indent="0">
               <a:buNone/>
-              <a:defRPr sz="2000">
+              <a:defRPr sz="2400">
                 <a:solidFill>
                   <a:schemeClr val="tx1">
-                    <a:tint val="75000"/>
+                    <a:tint val="82000"/>
                   </a:schemeClr>
                 </a:solidFill>
               </a:defRPr>
             </a:lvl1pPr>
             <a:lvl2pPr marL="457200" indent="0">
               <a:buNone/>
-              <a:defRPr sz="1800">
+              <a:defRPr sz="2000">
                 <a:solidFill>
                   <a:schemeClr val="tx1">
-                    <a:tint val="75000"/>
+                    <a:tint val="82000"/>
                   </a:schemeClr>
                 </a:solidFill>
               </a:defRPr>
             </a:lvl2pPr>
             <a:lvl3pPr marL="914400" indent="0">
               <a:buNone/>
-              <a:defRPr sz="1600">
+              <a:defRPr sz="1800">
                 <a:solidFill>
                   <a:schemeClr val="tx1">
-                    <a:tint val="75000"/>
+                    <a:tint val="82000"/>
                   </a:schemeClr>
                 </a:solidFill>
               </a:defRPr>
             </a:lvl3pPr>
             <a:lvl4pPr marL="1371600" indent="0">
               <a:buNone/>
-              <a:defRPr sz="1400">
+              <a:defRPr sz="1600">
                 <a:solidFill>
                   <a:schemeClr val="tx1">
-                    <a:tint val="75000"/>
+                    <a:tint val="82000"/>
                   </a:schemeClr>
                 </a:solidFill>
               </a:defRPr>
             </a:lvl4pPr>
             <a:lvl5pPr marL="1828800" indent="0">
               <a:buNone/>
-              <a:defRPr sz="1400">
+              <a:defRPr sz="1600">
                 <a:solidFill>
                   <a:schemeClr val="tx1">
-                    <a:tint val="75000"/>
+                    <a:tint val="82000"/>
                   </a:schemeClr>
                 </a:solidFill>
               </a:defRPr>
             </a:lvl5pPr>
             <a:lvl6pPr marL="2286000" indent="0">
               <a:buNone/>
-              <a:defRPr sz="1400">
+              <a:defRPr sz="1600">
                 <a:solidFill>
                   <a:schemeClr val="tx1">
-                    <a:tint val="75000"/>
+                    <a:tint val="82000"/>
                   </a:schemeClr>
                 </a:solidFill>
               </a:defRPr>
             </a:lvl6pPr>
             <a:lvl7pPr marL="2743200" indent="0">
               <a:buNone/>
-              <a:defRPr sz="1400">
+              <a:defRPr sz="1600">
                 <a:solidFill>
                   <a:schemeClr val="tx1">
-                    <a:tint val="75000"/>
+                    <a:tint val="82000"/>
                   </a:schemeClr>
                 </a:solidFill>
               </a:defRPr>
             </a:lvl7pPr>
             <a:lvl8pPr marL="3200400" indent="0">
               <a:buNone/>
-              <a:defRPr sz="1400">
+              <a:defRPr sz="1600">
                 <a:solidFill>
                   <a:schemeClr val="tx1">
-                    <a:tint val="75000"/>
+                    <a:tint val="82000"/>
                   </a:schemeClr>
                 </a:solidFill>
               </a:defRPr>
             </a:lvl8pPr>
             <a:lvl9pPr marL="3657600" indent="0">
               <a:buNone/>
-              <a:defRPr sz="1400">
+              <a:defRPr sz="1600">
                 <a:solidFill>
                   <a:schemeClr val="tx1">
-                    <a:tint val="75000"/>
+                    <a:tint val="82000"/>
                   </a:schemeClr>
                 </a:solidFill>
               </a:defRPr>
@@ -3296,7 +3378,13 @@
       </p:sp>
       <p:sp>
         <p:nvSpPr>
-          <p:cNvPr id="4" name="Date Placeholder 3"/>
+          <p:cNvPr id="4" name="Date Placeholder 3">
+            <a:extLst>
+              <a:ext uri="{FF2B5EF4-FFF2-40B4-BE49-F238E27FC236}">
+                <a16:creationId xmlns:a16="http://schemas.microsoft.com/office/drawing/2014/main" id="{6E7C3FEC-13AC-7276-811D-82A8D637A4C2}"/>
+              </a:ext>
+            </a:extLst>
+          </p:cNvPr>
           <p:cNvSpPr>
             <a:spLocks noGrp="1"/>
           </p:cNvSpPr>
@@ -3311,7 +3399,7 @@
           <a:p>
             <a:fld id="{5BCAD085-E8A6-8845-BD4E-CB4CCA059FC4}" type="datetimeFigureOut">
               <a:rPr lang="en-US" smtClean="0"/>
-              <a:t>9/23/2026</a:t>
+              <a:t>9/25/2026</a:t>
             </a:fld>
             <a:endParaRPr lang="en-US"/>
           </a:p>
@@ -3319,7 +3407,13 @@
       </p:sp>
       <p:sp>
         <p:nvSpPr>
-          <p:cNvPr id="5" name="Footer Placeholder 4"/>
+          <p:cNvPr id="5" name="Footer Placeholder 4">
+            <a:extLst>
+              <a:ext uri="{FF2B5EF4-FFF2-40B4-BE49-F238E27FC236}">
+                <a16:creationId xmlns:a16="http://schemas.microsoft.com/office/drawing/2014/main" id="{3282B915-373F-5BDE-9052-A689020CE219}"/>
+              </a:ext>
+            </a:extLst>
+          </p:cNvPr>
           <p:cNvSpPr>
             <a:spLocks noGrp="1"/>
           </p:cNvSpPr>
@@ -3338,7 +3432,13 @@
       </p:sp>
       <p:sp>
         <p:nvSpPr>
-          <p:cNvPr id="6" name="Slide Number Placeholder 5"/>
+          <p:cNvPr id="6" name="Slide Number Placeholder 5">
+            <a:extLst>
+              <a:ext uri="{FF2B5EF4-FFF2-40B4-BE49-F238E27FC236}">
+                <a16:creationId xmlns:a16="http://schemas.microsoft.com/office/drawing/2014/main" id="{2BFA7AFD-4C43-D64D-4222-8F8766C23A7B}"/>
+              </a:ext>
+            </a:extLst>
+          </p:cNvPr>
           <p:cNvSpPr>
             <a:spLocks noGrp="1"/>
           </p:cNvSpPr>
@@ -3362,7 +3462,7 @@
     </p:spTree>
     <p:extLst>
       <p:ext uri="{BB962C8B-B14F-4D97-AF65-F5344CB8AC3E}">
-        <p14:creationId xmlns:p14="http://schemas.microsoft.com/office/powerpoint/2010/main" val="960648375"/>
+        <p14:creationId xmlns:p14="http://schemas.microsoft.com/office/powerpoint/2010/main" val="3204543733"/>
       </p:ext>
     </p:extLst>
   </p:cSld>
@@ -3391,7 +3491,13 @@
       </p:grpSpPr>
       <p:sp>
         <p:nvSpPr>
-          <p:cNvPr id="2" name="Title 1"/>
+          <p:cNvPr id="2" name="Title 1">
+            <a:extLst>
+              <a:ext uri="{FF2B5EF4-FFF2-40B4-BE49-F238E27FC236}">
+                <a16:creationId xmlns:a16="http://schemas.microsoft.com/office/drawing/2014/main" id="{8DD4B693-9133-FA77-9E67-DC176EA27AD2}"/>
+              </a:ext>
+            </a:extLst>
+          </p:cNvPr>
           <p:cNvSpPr>
             <a:spLocks noGrp="1"/>
           </p:cNvSpPr>
@@ -3413,7 +3519,13 @@
       </p:sp>
       <p:sp>
         <p:nvSpPr>
-          <p:cNvPr id="3" name="Content Placeholder 2"/>
+          <p:cNvPr id="3" name="Content Placeholder 2">
+            <a:extLst>
+              <a:ext uri="{FF2B5EF4-FFF2-40B4-BE49-F238E27FC236}">
+                <a16:creationId xmlns:a16="http://schemas.microsoft.com/office/drawing/2014/main" id="{12E119B6-6848-8BEF-958C-2DAE8E9B1ECB}"/>
+              </a:ext>
+            </a:extLst>
+          </p:cNvPr>
           <p:cNvSpPr>
             <a:spLocks noGrp="1"/>
           </p:cNvSpPr>
@@ -3423,41 +3535,13 @@
         </p:nvSpPr>
         <p:spPr>
           <a:xfrm>
-            <a:off x="457200" y="1600200"/>
-            <a:ext cx="4038600" cy="4525963"/>
+            <a:off x="838200" y="1825625"/>
+            <a:ext cx="5181600" cy="4351338"/>
           </a:xfrm>
         </p:spPr>
         <p:txBody>
           <a:bodyPr/>
-          <a:lstStyle>
-            <a:lvl1pPr>
-              <a:defRPr sz="2800"/>
-            </a:lvl1pPr>
-            <a:lvl2pPr>
-              <a:defRPr sz="2400"/>
-            </a:lvl2pPr>
-            <a:lvl3pPr>
-              <a:defRPr sz="2000"/>
-            </a:lvl3pPr>
-            <a:lvl4pPr>
-              <a:defRPr sz="1800"/>
-            </a:lvl4pPr>
-            <a:lvl5pPr>
-              <a:defRPr sz="1800"/>
-            </a:lvl5pPr>
-            <a:lvl6pPr>
-              <a:defRPr sz="1800"/>
-            </a:lvl6pPr>
-            <a:lvl7pPr>
-              <a:defRPr sz="1800"/>
-            </a:lvl7pPr>
-            <a:lvl8pPr>
-              <a:defRPr sz="1800"/>
-            </a:lvl8pPr>
-            <a:lvl9pPr>
-              <a:defRPr sz="1800"/>
-            </a:lvl9pPr>
-          </a:lstStyle>
+          <a:lstStyle/>
           <a:p>
             <a:pPr lvl="0"/>
             <a:r>
@@ -3497,7 +3581,13 @@
       </p:sp>
       <p:sp>
         <p:nvSpPr>
-          <p:cNvPr id="4" name="Content Placeholder 3"/>
+          <p:cNvPr id="4" name="Content Placeholder 3">
+            <a:extLst>
+              <a:ext uri="{FF2B5EF4-FFF2-40B4-BE49-F238E27FC236}">
+                <a16:creationId xmlns:a16="http://schemas.microsoft.com/office/drawing/2014/main" id="{CD48C3C3-A41D-C5BC-06CE-A836E81712C4}"/>
+              </a:ext>
+            </a:extLst>
+          </p:cNvPr>
           <p:cNvSpPr>
             <a:spLocks noGrp="1"/>
           </p:cNvSpPr>
@@ -3507,41 +3597,13 @@
         </p:nvSpPr>
         <p:spPr>
           <a:xfrm>
-            <a:off x="4648200" y="1600200"/>
-            <a:ext cx="4038600" cy="4525963"/>
+            <a:off x="6172200" y="1825625"/>
+            <a:ext cx="5181600" cy="4351338"/>
           </a:xfrm>
         </p:spPr>
         <p:txBody>
           <a:bodyPr/>
-          <a:lstStyle>
-            <a:lvl1pPr>
-              <a:defRPr sz="2800"/>
-            </a:lvl1pPr>
-            <a:lvl2pPr>
-              <a:defRPr sz="2400"/>
-            </a:lvl2pPr>
-            <a:lvl3pPr>
-              <a:defRPr sz="2000"/>
-            </a:lvl3pPr>
-            <a:lvl4pPr>
-              <a:defRPr sz="1800"/>
-            </a:lvl4pPr>
-            <a:lvl5pPr>
-              <a:defRPr sz="1800"/>
-            </a:lvl5pPr>
-            <a:lvl6pPr>
-              <a:defRPr sz="1800"/>
-            </a:lvl6pPr>
-            <a:lvl7pPr>
-              <a:defRPr sz="1800"/>
-            </a:lvl7pPr>
-            <a:lvl8pPr>
-              <a:defRPr sz="1800"/>
-            </a:lvl8pPr>
-            <a:lvl9pPr>
-              <a:defRPr sz="1800"/>
-            </a:lvl9pPr>
-          </a:lstStyle>
+          <a:lstStyle/>
           <a:p>
             <a:pPr lvl="0"/>
             <a:r>
@@ -3581,7 +3643,13 @@
       </p:sp>
       <p:sp>
         <p:nvSpPr>
-          <p:cNvPr id="5" name="Date Placeholder 4"/>
+          <p:cNvPr id="5" name="Date Placeholder 4">
+            <a:extLst>
+              <a:ext uri="{FF2B5EF4-FFF2-40B4-BE49-F238E27FC236}">
+                <a16:creationId xmlns:a16="http://schemas.microsoft.com/office/drawing/2014/main" id="{02B9D57C-B2A5-E001-E17F-BC83FEE3262E}"/>
+              </a:ext>
+            </a:extLst>
+          </p:cNvPr>
           <p:cNvSpPr>
             <a:spLocks noGrp="1"/>
           </p:cNvSpPr>
@@ -3596,7 +3664,7 @@
           <a:p>
             <a:fld id="{5BCAD085-E8A6-8845-BD4E-CB4CCA059FC4}" type="datetimeFigureOut">
               <a:rPr lang="en-US" smtClean="0"/>
-              <a:t>9/23/2026</a:t>
+              <a:t>9/25/2026</a:t>
             </a:fld>
             <a:endParaRPr lang="en-US"/>
           </a:p>
@@ -3604,7 +3672,13 @@
       </p:sp>
       <p:sp>
         <p:nvSpPr>
-          <p:cNvPr id="6" name="Footer Placeholder 5"/>
+          <p:cNvPr id="6" name="Footer Placeholder 5">
+            <a:extLst>
+              <a:ext uri="{FF2B5EF4-FFF2-40B4-BE49-F238E27FC236}">
+                <a16:creationId xmlns:a16="http://schemas.microsoft.com/office/drawing/2014/main" id="{E4AE2B84-05C8-F9D2-9BFE-08EB7A5C4029}"/>
+              </a:ext>
+            </a:extLst>
+          </p:cNvPr>
           <p:cNvSpPr>
             <a:spLocks noGrp="1"/>
           </p:cNvSpPr>
@@ -3623,7 +3697,13 @@
       </p:sp>
       <p:sp>
         <p:nvSpPr>
-          <p:cNvPr id="7" name="Slide Number Placeholder 6"/>
+          <p:cNvPr id="7" name="Slide Number Placeholder 6">
+            <a:extLst>
+              <a:ext uri="{FF2B5EF4-FFF2-40B4-BE49-F238E27FC236}">
+                <a16:creationId xmlns:a16="http://schemas.microsoft.com/office/drawing/2014/main" id="{AF7BD9C3-7B9D-8D1B-6570-9137AD257F94}"/>
+              </a:ext>
+            </a:extLst>
+          </p:cNvPr>
           <p:cNvSpPr>
             <a:spLocks noGrp="1"/>
           </p:cNvSpPr>
@@ -3647,7 +3727,7 @@
     </p:spTree>
     <p:extLst>
       <p:ext uri="{BB962C8B-B14F-4D97-AF65-F5344CB8AC3E}">
-        <p14:creationId xmlns:p14="http://schemas.microsoft.com/office/powerpoint/2010/main" val="2782244947"/>
+        <p14:creationId xmlns:p14="http://schemas.microsoft.com/office/powerpoint/2010/main" val="275939186"/>
       </p:ext>
     </p:extLst>
   </p:cSld>
@@ -3676,7 +3756,13 @@
       </p:grpSpPr>
       <p:sp>
         <p:nvSpPr>
-          <p:cNvPr id="2" name="Title 1"/>
+          <p:cNvPr id="2" name="Title 1">
+            <a:extLst>
+              <a:ext uri="{FF2B5EF4-FFF2-40B4-BE49-F238E27FC236}">
+                <a16:creationId xmlns:a16="http://schemas.microsoft.com/office/drawing/2014/main" id="{4720E69C-A5D7-3DEA-406A-519D525BF1B5}"/>
+              </a:ext>
+            </a:extLst>
+          </p:cNvPr>
           <p:cNvSpPr>
             <a:spLocks noGrp="1"/>
           </p:cNvSpPr>
@@ -3684,14 +3770,15 @@
             <p:ph type="title"/>
           </p:nvPr>
         </p:nvSpPr>
-        <p:spPr/>
+        <p:spPr>
+          <a:xfrm>
+            <a:off x="839788" y="365125"/>
+            <a:ext cx="10515600" cy="1325563"/>
+          </a:xfrm>
+        </p:spPr>
         <p:txBody>
           <a:bodyPr/>
-          <a:lstStyle>
-            <a:lvl1pPr>
-              <a:defRPr/>
-            </a:lvl1pPr>
-          </a:lstStyle>
+          <a:lstStyle/>
           <a:p>
             <a:r>
               <a:rPr lang="en-US"/>
@@ -3702,7 +3789,13 @@
       </p:sp>
       <p:sp>
         <p:nvSpPr>
-          <p:cNvPr id="3" name="Text Placeholder 2"/>
+          <p:cNvPr id="3" name="Text Placeholder 2">
+            <a:extLst>
+              <a:ext uri="{FF2B5EF4-FFF2-40B4-BE49-F238E27FC236}">
+                <a16:creationId xmlns:a16="http://schemas.microsoft.com/office/drawing/2014/main" id="{6F86B344-158F-7895-DEAE-4FD76B6E4784}"/>
+              </a:ext>
+            </a:extLst>
+          </p:cNvPr>
           <p:cNvSpPr>
             <a:spLocks noGrp="1"/>
           </p:cNvSpPr>
@@ -3712,8 +3805,8 @@
         </p:nvSpPr>
         <p:spPr>
           <a:xfrm>
-            <a:off x="457200" y="1535113"/>
-            <a:ext cx="4040188" cy="639762"/>
+            <a:off x="839788" y="1681163"/>
+            <a:ext cx="5157787" cy="823912"/>
           </a:xfrm>
         </p:spPr>
         <p:txBody>
@@ -3767,7 +3860,13 @@
       </p:sp>
       <p:sp>
         <p:nvSpPr>
-          <p:cNvPr id="4" name="Content Placeholder 3"/>
+          <p:cNvPr id="4" name="Content Placeholder 3">
+            <a:extLst>
+              <a:ext uri="{FF2B5EF4-FFF2-40B4-BE49-F238E27FC236}">
+                <a16:creationId xmlns:a16="http://schemas.microsoft.com/office/drawing/2014/main" id="{F4D01031-AC2C-04C4-93DA-2B5AA003D1C7}"/>
+              </a:ext>
+            </a:extLst>
+          </p:cNvPr>
           <p:cNvSpPr>
             <a:spLocks noGrp="1"/>
           </p:cNvSpPr>
@@ -3777,41 +3876,13 @@
         </p:nvSpPr>
         <p:spPr>
           <a:xfrm>
-            <a:off x="457200" y="2174875"/>
-            <a:ext cx="4040188" cy="3951288"/>
+            <a:off x="839788" y="2505075"/>
+            <a:ext cx="5157787" cy="3684588"/>
           </a:xfrm>
         </p:spPr>
         <p:txBody>
           <a:bodyPr/>
-          <a:lstStyle>
-            <a:lvl1pPr>
-              <a:defRPr sz="2400"/>
-            </a:lvl1pPr>
-            <a:lvl2pPr>
-              <a:defRPr sz="2000"/>
-            </a:lvl2pPr>
-            <a:lvl3pPr>
-              <a:defRPr sz="1800"/>
-            </a:lvl3pPr>
-            <a:lvl4pPr>
-              <a:defRPr sz="1600"/>
-            </a:lvl4pPr>
-            <a:lvl5pPr>
-              <a:defRPr sz="1600"/>
-            </a:lvl5pPr>
-            <a:lvl6pPr>
-              <a:defRPr sz="1600"/>
-            </a:lvl6pPr>
-            <a:lvl7pPr>
-              <a:defRPr sz="1600"/>
-            </a:lvl7pPr>
-            <a:lvl8pPr>
-              <a:defRPr sz="1600"/>
-            </a:lvl8pPr>
-            <a:lvl9pPr>
-              <a:defRPr sz="1600"/>
-            </a:lvl9pPr>
-          </a:lstStyle>
+          <a:lstStyle/>
           <a:p>
             <a:pPr lvl="0"/>
             <a:r>
@@ -3851,7 +3922,13 @@
       </p:sp>
       <p:sp>
         <p:nvSpPr>
-          <p:cNvPr id="5" name="Text Placeholder 4"/>
+          <p:cNvPr id="5" name="Text Placeholder 4">
+            <a:extLst>
+              <a:ext uri="{FF2B5EF4-FFF2-40B4-BE49-F238E27FC236}">
+                <a16:creationId xmlns:a16="http://schemas.microsoft.com/office/drawing/2014/main" id="{184C9C04-DAB3-0DBD-B234-C85624512B12}"/>
+              </a:ext>
+            </a:extLst>
+          </p:cNvPr>
           <p:cNvSpPr>
             <a:spLocks noGrp="1"/>
           </p:cNvSpPr>
@@ -3861,8 +3938,8 @@
         </p:nvSpPr>
         <p:spPr>
           <a:xfrm>
-            <a:off x="4645025" y="1535113"/>
-            <a:ext cx="4041775" cy="639762"/>
+            <a:off x="6172200" y="1681163"/>
+            <a:ext cx="5183188" cy="823912"/>
           </a:xfrm>
         </p:spPr>
         <p:txBody>
@@ -3916,7 +3993,13 @@
       </p:sp>
       <p:sp>
         <p:nvSpPr>
-          <p:cNvPr id="6" name="Content Placeholder 5"/>
+          <p:cNvPr id="6" name="Content Placeholder 5">
+            <a:extLst>
+              <a:ext uri="{FF2B5EF4-FFF2-40B4-BE49-F238E27FC236}">
+                <a16:creationId xmlns:a16="http://schemas.microsoft.com/office/drawing/2014/main" id="{508AB2B9-09D1-58F2-84F9-1098E68A877C}"/>
+              </a:ext>
+            </a:extLst>
+          </p:cNvPr>
           <p:cNvSpPr>
             <a:spLocks noGrp="1"/>
           </p:cNvSpPr>
@@ -3926,41 +4009,13 @@
         </p:nvSpPr>
         <p:spPr>
           <a:xfrm>
-            <a:off x="4645025" y="2174875"/>
-            <a:ext cx="4041775" cy="3951288"/>
+            <a:off x="6172200" y="2505075"/>
+            <a:ext cx="5183188" cy="3684588"/>
           </a:xfrm>
         </p:spPr>
         <p:txBody>
           <a:bodyPr/>
-          <a:lstStyle>
-            <a:lvl1pPr>
-              <a:defRPr sz="2400"/>
-            </a:lvl1pPr>
-            <a:lvl2pPr>
-              <a:defRPr sz="2000"/>
-            </a:lvl2pPr>
-            <a:lvl3pPr>
-              <a:defRPr sz="1800"/>
-            </a:lvl3pPr>
-            <a:lvl4pPr>
-              <a:defRPr sz="1600"/>
-            </a:lvl4pPr>
-            <a:lvl5pPr>
-              <a:defRPr sz="1600"/>
-            </a:lvl5pPr>
-            <a:lvl6pPr>
-              <a:defRPr sz="1600"/>
-            </a:lvl6pPr>
-            <a:lvl7pPr>
-              <a:defRPr sz="1600"/>
-            </a:lvl7pPr>
-            <a:lvl8pPr>
-              <a:defRPr sz="1600"/>
-            </a:lvl8pPr>
-            <a:lvl9pPr>
-              <a:defRPr sz="1600"/>
-            </a:lvl9pPr>
-          </a:lstStyle>
+          <a:lstStyle/>
           <a:p>
             <a:pPr lvl="0"/>
             <a:r>
@@ -4000,7 +4055,13 @@
       </p:sp>
       <p:sp>
         <p:nvSpPr>
-          <p:cNvPr id="7" name="Date Placeholder 6"/>
+          <p:cNvPr id="7" name="Date Placeholder 6">
+            <a:extLst>
+              <a:ext uri="{FF2B5EF4-FFF2-40B4-BE49-F238E27FC236}">
+                <a16:creationId xmlns:a16="http://schemas.microsoft.com/office/drawing/2014/main" id="{BCC97FE7-1863-4B77-B26B-8CABBAC7D739}"/>
+              </a:ext>
+            </a:extLst>
+          </p:cNvPr>
           <p:cNvSpPr>
             <a:spLocks noGrp="1"/>
           </p:cNvSpPr>
@@ -4015,7 +4076,7 @@
           <a:p>
             <a:fld id="{5BCAD085-E8A6-8845-BD4E-CB4CCA059FC4}" type="datetimeFigureOut">
               <a:rPr lang="en-US" smtClean="0"/>
-              <a:t>9/23/2026</a:t>
+              <a:t>9/25/2026</a:t>
             </a:fld>
             <a:endParaRPr lang="en-US"/>
           </a:p>
@@ -4023,7 +4084,13 @@
       </p:sp>
       <p:sp>
         <p:nvSpPr>
-          <p:cNvPr id="8" name="Footer Placeholder 7"/>
+          <p:cNvPr id="8" name="Footer Placeholder 7">
+            <a:extLst>
+              <a:ext uri="{FF2B5EF4-FFF2-40B4-BE49-F238E27FC236}">
+                <a16:creationId xmlns:a16="http://schemas.microsoft.com/office/drawing/2014/main" id="{8E417C18-9FBD-702D-ACB2-740BDD3FC1AF}"/>
+              </a:ext>
+            </a:extLst>
+          </p:cNvPr>
           <p:cNvSpPr>
             <a:spLocks noGrp="1"/>
           </p:cNvSpPr>
@@ -4042,7 +4109,13 @@
       </p:sp>
       <p:sp>
         <p:nvSpPr>
-          <p:cNvPr id="9" name="Slide Number Placeholder 8"/>
+          <p:cNvPr id="9" name="Slide Number Placeholder 8">
+            <a:extLst>
+              <a:ext uri="{FF2B5EF4-FFF2-40B4-BE49-F238E27FC236}">
+                <a16:creationId xmlns:a16="http://schemas.microsoft.com/office/drawing/2014/main" id="{66E67B13-473C-9E41-57E9-1337E63C5D66}"/>
+              </a:ext>
+            </a:extLst>
+          </p:cNvPr>
           <p:cNvSpPr>
             <a:spLocks noGrp="1"/>
           </p:cNvSpPr>
@@ -4066,7 +4139,7 @@
     </p:spTree>
     <p:extLst>
       <p:ext uri="{BB962C8B-B14F-4D97-AF65-F5344CB8AC3E}">
-        <p14:creationId xmlns:p14="http://schemas.microsoft.com/office/powerpoint/2010/main" val="990158736"/>
+        <p14:creationId xmlns:p14="http://schemas.microsoft.com/office/powerpoint/2010/main" val="2144302100"/>
       </p:ext>
     </p:extLst>
   </p:cSld>
@@ -4095,7 +4168,13 @@
       </p:grpSpPr>
       <p:sp>
         <p:nvSpPr>
-          <p:cNvPr id="2" name="Title 1"/>
+          <p:cNvPr id="2" name="Title 1">
+            <a:extLst>
+              <a:ext uri="{FF2B5EF4-FFF2-40B4-BE49-F238E27FC236}">
+                <a16:creationId xmlns:a16="http://schemas.microsoft.com/office/drawing/2014/main" id="{18A921D6-2FF2-E400-D0C0-EA586B4FCE66}"/>
+              </a:ext>
+            </a:extLst>
+          </p:cNvPr>
           <p:cNvSpPr>
             <a:spLocks noGrp="1"/>
           </p:cNvSpPr>
@@ -4117,7 +4196,13 @@
       </p:sp>
       <p:sp>
         <p:nvSpPr>
-          <p:cNvPr id="3" name="Date Placeholder 2"/>
+          <p:cNvPr id="3" name="Date Placeholder 2">
+            <a:extLst>
+              <a:ext uri="{FF2B5EF4-FFF2-40B4-BE49-F238E27FC236}">
+                <a16:creationId xmlns:a16="http://schemas.microsoft.com/office/drawing/2014/main" id="{E99C9337-9BF1-31DB-D649-F86C84EA386D}"/>
+              </a:ext>
+            </a:extLst>
+          </p:cNvPr>
           <p:cNvSpPr>
             <a:spLocks noGrp="1"/>
           </p:cNvSpPr>
@@ -4132,7 +4217,7 @@
           <a:p>
             <a:fld id="{5BCAD085-E8A6-8845-BD4E-CB4CCA059FC4}" type="datetimeFigureOut">
               <a:rPr lang="en-US" smtClean="0"/>
-              <a:t>9/23/2026</a:t>
+              <a:t>9/25/2026</a:t>
             </a:fld>
             <a:endParaRPr lang="en-US"/>
           </a:p>
@@ -4140,7 +4225,13 @@
       </p:sp>
       <p:sp>
         <p:nvSpPr>
-          <p:cNvPr id="4" name="Footer Placeholder 3"/>
+          <p:cNvPr id="4" name="Footer Placeholder 3">
+            <a:extLst>
+              <a:ext uri="{FF2B5EF4-FFF2-40B4-BE49-F238E27FC236}">
+                <a16:creationId xmlns:a16="http://schemas.microsoft.com/office/drawing/2014/main" id="{9062F3A3-417C-1485-4A79-B3540C54F40F}"/>
+              </a:ext>
+            </a:extLst>
+          </p:cNvPr>
           <p:cNvSpPr>
             <a:spLocks noGrp="1"/>
           </p:cNvSpPr>
@@ -4159,7 +4250,13 @@
       </p:sp>
       <p:sp>
         <p:nvSpPr>
-          <p:cNvPr id="5" name="Slide Number Placeholder 4"/>
+          <p:cNvPr id="5" name="Slide Number Placeholder 4">
+            <a:extLst>
+              <a:ext uri="{FF2B5EF4-FFF2-40B4-BE49-F238E27FC236}">
+                <a16:creationId xmlns:a16="http://schemas.microsoft.com/office/drawing/2014/main" id="{C69233B6-0167-B16E-39F8-740CFDF84062}"/>
+              </a:ext>
+            </a:extLst>
+          </p:cNvPr>
           <p:cNvSpPr>
             <a:spLocks noGrp="1"/>
           </p:cNvSpPr>
@@ -4183,7 +4280,7 @@
     </p:spTree>
     <p:extLst>
       <p:ext uri="{BB962C8B-B14F-4D97-AF65-F5344CB8AC3E}">
-        <p14:creationId xmlns:p14="http://schemas.microsoft.com/office/powerpoint/2010/main" val="727027711"/>
+        <p14:creationId xmlns:p14="http://schemas.microsoft.com/office/powerpoint/2010/main" val="3629197874"/>
       </p:ext>
     </p:extLst>
   </p:cSld>
@@ -4212,7 +4309,13 @@
       </p:grpSpPr>
       <p:sp>
         <p:nvSpPr>
-          <p:cNvPr id="2" name="Date Placeholder 1"/>
+          <p:cNvPr id="2" name="Date Placeholder 1">
+            <a:extLst>
+              <a:ext uri="{FF2B5EF4-FFF2-40B4-BE49-F238E27FC236}">
+                <a16:creationId xmlns:a16="http://schemas.microsoft.com/office/drawing/2014/main" id="{F2C64D43-6999-FECD-8B54-089CEB271A22}"/>
+              </a:ext>
+            </a:extLst>
+          </p:cNvPr>
           <p:cNvSpPr>
             <a:spLocks noGrp="1"/>
           </p:cNvSpPr>
@@ -4227,7 +4330,7 @@
           <a:p>
             <a:fld id="{5BCAD085-E8A6-8845-BD4E-CB4CCA059FC4}" type="datetimeFigureOut">
               <a:rPr lang="en-US" smtClean="0"/>
-              <a:t>9/23/2026</a:t>
+              <a:t>9/25/2026</a:t>
             </a:fld>
             <a:endParaRPr lang="en-US"/>
           </a:p>
@@ -4235,7 +4338,13 @@
       </p:sp>
       <p:sp>
         <p:nvSpPr>
-          <p:cNvPr id="3" name="Footer Placeholder 2"/>
+          <p:cNvPr id="3" name="Footer Placeholder 2">
+            <a:extLst>
+              <a:ext uri="{FF2B5EF4-FFF2-40B4-BE49-F238E27FC236}">
+                <a16:creationId xmlns:a16="http://schemas.microsoft.com/office/drawing/2014/main" id="{7BDF77C9-70AB-FC61-5ECA-9B7ED14D394B}"/>
+              </a:ext>
+            </a:extLst>
+          </p:cNvPr>
           <p:cNvSpPr>
             <a:spLocks noGrp="1"/>
           </p:cNvSpPr>
@@ -4254,7 +4363,13 @@
       </p:sp>
       <p:sp>
         <p:nvSpPr>
-          <p:cNvPr id="4" name="Slide Number Placeholder 3"/>
+          <p:cNvPr id="4" name="Slide Number Placeholder 3">
+            <a:extLst>
+              <a:ext uri="{FF2B5EF4-FFF2-40B4-BE49-F238E27FC236}">
+                <a16:creationId xmlns:a16="http://schemas.microsoft.com/office/drawing/2014/main" id="{FE034F25-31E8-D37A-BF47-1C975C2163F9}"/>
+              </a:ext>
+            </a:extLst>
+          </p:cNvPr>
           <p:cNvSpPr>
             <a:spLocks noGrp="1"/>
           </p:cNvSpPr>
@@ -4278,7 +4393,7 @@
     </p:spTree>
     <p:extLst>
       <p:ext uri="{BB962C8B-B14F-4D97-AF65-F5344CB8AC3E}">
-        <p14:creationId xmlns:p14="http://schemas.microsoft.com/office/powerpoint/2010/main" val="1212999818"/>
+        <p14:creationId xmlns:p14="http://schemas.microsoft.com/office/powerpoint/2010/main" val="4248306070"/>
       </p:ext>
     </p:extLst>
   </p:cSld>
@@ -4307,7 +4422,13 @@
       </p:grpSpPr>
       <p:sp>
         <p:nvSpPr>
-          <p:cNvPr id="2" name="Title 1"/>
+          <p:cNvPr id="2" name="Title 1">
+            <a:extLst>
+              <a:ext uri="{FF2B5EF4-FFF2-40B4-BE49-F238E27FC236}">
+                <a16:creationId xmlns:a16="http://schemas.microsoft.com/office/drawing/2014/main" id="{65A2DE3B-C7AC-A69D-D508-872146BECF18}"/>
+              </a:ext>
+            </a:extLst>
+          </p:cNvPr>
           <p:cNvSpPr>
             <a:spLocks noGrp="1"/>
           </p:cNvSpPr>
@@ -4317,15 +4438,15 @@
         </p:nvSpPr>
         <p:spPr>
           <a:xfrm>
-            <a:off x="457200" y="273050"/>
-            <a:ext cx="3008313" cy="1162050"/>
+            <a:off x="839788" y="457200"/>
+            <a:ext cx="3932237" cy="1600200"/>
           </a:xfrm>
         </p:spPr>
         <p:txBody>
           <a:bodyPr anchor="b"/>
           <a:lstStyle>
-            <a:lvl1pPr algn="l">
-              <a:defRPr sz="2000" b="1"/>
+            <a:lvl1pPr>
+              <a:defRPr sz="3200"/>
             </a:lvl1pPr>
           </a:lstStyle>
           <a:p>
@@ -4338,7 +4459,13 @@
       </p:sp>
       <p:sp>
         <p:nvSpPr>
-          <p:cNvPr id="3" name="Content Placeholder 2"/>
+          <p:cNvPr id="3" name="Content Placeholder 2">
+            <a:extLst>
+              <a:ext uri="{FF2B5EF4-FFF2-40B4-BE49-F238E27FC236}">
+                <a16:creationId xmlns:a16="http://schemas.microsoft.com/office/drawing/2014/main" id="{88A25C90-61D8-16D8-B431-ED179169615C}"/>
+              </a:ext>
+            </a:extLst>
+          </p:cNvPr>
           <p:cNvSpPr>
             <a:spLocks noGrp="1"/>
           </p:cNvSpPr>
@@ -4348,8 +4475,8 @@
         </p:nvSpPr>
         <p:spPr>
           <a:xfrm>
-            <a:off x="3575050" y="273050"/>
-            <a:ext cx="5111750" cy="5853113"/>
+            <a:off x="5183188" y="987425"/>
+            <a:ext cx="6172200" cy="4873625"/>
           </a:xfrm>
         </p:spPr>
         <p:txBody>
@@ -4422,7 +4549,13 @@
       </p:sp>
       <p:sp>
         <p:nvSpPr>
-          <p:cNvPr id="4" name="Text Placeholder 3"/>
+          <p:cNvPr id="4" name="Text Placeholder 3">
+            <a:extLst>
+              <a:ext uri="{FF2B5EF4-FFF2-40B4-BE49-F238E27FC236}">
+                <a16:creationId xmlns:a16="http://schemas.microsoft.com/office/drawing/2014/main" id="{56C40B41-8F3D-9708-0C50-ABBE56F158FA}"/>
+              </a:ext>
+            </a:extLst>
+          </p:cNvPr>
           <p:cNvSpPr>
             <a:spLocks noGrp="1"/>
           </p:cNvSpPr>
@@ -4432,8 +4565,8 @@
         </p:nvSpPr>
         <p:spPr>
           <a:xfrm>
-            <a:off x="457200" y="1435100"/>
-            <a:ext cx="3008313" cy="4691063"/>
+            <a:off x="839788" y="2057400"/>
+            <a:ext cx="3932237" cy="3811588"/>
           </a:xfrm>
         </p:spPr>
         <p:txBody>
@@ -4441,39 +4574,39 @@
           <a:lstStyle>
             <a:lvl1pPr marL="0" indent="0">
               <a:buNone/>
-              <a:defRPr sz="1400"/>
+              <a:defRPr sz="1600"/>
             </a:lvl1pPr>
             <a:lvl2pPr marL="457200" indent="0">
               <a:buNone/>
-              <a:defRPr sz="1200"/>
+              <a:defRPr sz="1400"/>
             </a:lvl2pPr>
             <a:lvl3pPr marL="914400" indent="0">
               <a:buNone/>
-              <a:defRPr sz="1000"/>
+              <a:defRPr sz="1200"/>
             </a:lvl3pPr>
             <a:lvl4pPr marL="1371600" indent="0">
               <a:buNone/>
-              <a:defRPr sz="900"/>
+              <a:defRPr sz="1000"/>
             </a:lvl4pPr>
             <a:lvl5pPr marL="1828800" indent="0">
               <a:buNone/>
-              <a:defRPr sz="900"/>
+              <a:defRPr sz="1000"/>
             </a:lvl5pPr>
             <a:lvl6pPr marL="2286000" indent="0">
               <a:buNone/>
-              <a:defRPr sz="900"/>
+              <a:defRPr sz="1000"/>
             </a:lvl6pPr>
             <a:lvl7pPr marL="2743200" indent="0">
               <a:buNone/>
-              <a:defRPr sz="900"/>
+              <a:defRPr sz="1000"/>
             </a:lvl7pPr>
             <a:lvl8pPr marL="3200400" indent="0">
               <a:buNone/>
-              <a:defRPr sz="900"/>
+              <a:defRPr sz="1000"/>
             </a:lvl8pPr>
             <a:lvl9pPr marL="3657600" indent="0">
               <a:buNone/>
-              <a:defRPr sz="900"/>
+              <a:defRPr sz="1000"/>
             </a:lvl9pPr>
           </a:lstStyle>
           <a:p>
@@ -4487,7 +4620,13 @@
       </p:sp>
       <p:sp>
         <p:nvSpPr>
-          <p:cNvPr id="5" name="Date Placeholder 4"/>
+          <p:cNvPr id="5" name="Date Placeholder 4">
+            <a:extLst>
+              <a:ext uri="{FF2B5EF4-FFF2-40B4-BE49-F238E27FC236}">
+                <a16:creationId xmlns:a16="http://schemas.microsoft.com/office/drawing/2014/main" id="{655BD474-8C68-7C7A-DD45-288C150C8029}"/>
+              </a:ext>
+            </a:extLst>
+          </p:cNvPr>
           <p:cNvSpPr>
             <a:spLocks noGrp="1"/>
           </p:cNvSpPr>
@@ -4502,7 +4641,7 @@
           <a:p>
             <a:fld id="{5BCAD085-E8A6-8845-BD4E-CB4CCA059FC4}" type="datetimeFigureOut">
               <a:rPr lang="en-US" smtClean="0"/>
-              <a:t>9/23/2026</a:t>
+              <a:t>9/25/2026</a:t>
             </a:fld>
             <a:endParaRPr lang="en-US"/>
           </a:p>
@@ -4510,7 +4649,13 @@
       </p:sp>
       <p:sp>
         <p:nvSpPr>
-          <p:cNvPr id="6" name="Footer Placeholder 5"/>
+          <p:cNvPr id="6" name="Footer Placeholder 5">
+            <a:extLst>
+              <a:ext uri="{FF2B5EF4-FFF2-40B4-BE49-F238E27FC236}">
+                <a16:creationId xmlns:a16="http://schemas.microsoft.com/office/drawing/2014/main" id="{EC79D134-2399-D107-9609-3B4ACC6812E7}"/>
+              </a:ext>
+            </a:extLst>
+          </p:cNvPr>
           <p:cNvSpPr>
             <a:spLocks noGrp="1"/>
           </p:cNvSpPr>
@@ -4529,7 +4674,13 @@
       </p:sp>
       <p:sp>
         <p:nvSpPr>
-          <p:cNvPr id="7" name="Slide Number Placeholder 6"/>
+          <p:cNvPr id="7" name="Slide Number Placeholder 6">
+            <a:extLst>
+              <a:ext uri="{FF2B5EF4-FFF2-40B4-BE49-F238E27FC236}">
+                <a16:creationId xmlns:a16="http://schemas.microsoft.com/office/drawing/2014/main" id="{FFFAA8C8-06CD-8535-A403-17D55E3D5EB3}"/>
+              </a:ext>
+            </a:extLst>
+          </p:cNvPr>
           <p:cNvSpPr>
             <a:spLocks noGrp="1"/>
           </p:cNvSpPr>
@@ -4553,7 +4704,7 @@
     </p:spTree>
     <p:extLst>
       <p:ext uri="{BB962C8B-B14F-4D97-AF65-F5344CB8AC3E}">
-        <p14:creationId xmlns:p14="http://schemas.microsoft.com/office/powerpoint/2010/main" val="1840726560"/>
+        <p14:creationId xmlns:p14="http://schemas.microsoft.com/office/powerpoint/2010/main" val="2797604511"/>
       </p:ext>
     </p:extLst>
   </p:cSld>
@@ -4582,7 +4733,13 @@
       </p:grpSpPr>
       <p:sp>
         <p:nvSpPr>
-          <p:cNvPr id="2" name="Title 1"/>
+          <p:cNvPr id="2" name="Title 1">
+            <a:extLst>
+              <a:ext uri="{FF2B5EF4-FFF2-40B4-BE49-F238E27FC236}">
+                <a16:creationId xmlns:a16="http://schemas.microsoft.com/office/drawing/2014/main" id="{99E1AFE2-3B9B-59AF-DD16-7BAF04D08602}"/>
+              </a:ext>
+            </a:extLst>
+          </p:cNvPr>
           <p:cNvSpPr>
             <a:spLocks noGrp="1"/>
           </p:cNvSpPr>
@@ -4592,15 +4749,15 @@
         </p:nvSpPr>
         <p:spPr>
           <a:xfrm>
-            <a:off x="1792288" y="4800600"/>
-            <a:ext cx="5486400" cy="566738"/>
+            <a:off x="839788" y="457200"/>
+            <a:ext cx="3932237" cy="1600200"/>
           </a:xfrm>
         </p:spPr>
         <p:txBody>
           <a:bodyPr anchor="b"/>
           <a:lstStyle>
-            <a:lvl1pPr algn="l">
-              <a:defRPr sz="2000" b="1"/>
+            <a:lvl1pPr>
+              <a:defRPr sz="3200"/>
             </a:lvl1pPr>
           </a:lstStyle>
           <a:p>
@@ -4613,7 +4770,13 @@
       </p:sp>
       <p:sp>
         <p:nvSpPr>
-          <p:cNvPr id="3" name="Picture Placeholder 2"/>
+          <p:cNvPr id="3" name="Picture Placeholder 2">
+            <a:extLst>
+              <a:ext uri="{FF2B5EF4-FFF2-40B4-BE49-F238E27FC236}">
+                <a16:creationId xmlns:a16="http://schemas.microsoft.com/office/drawing/2014/main" id="{FB5CF258-A243-407A-BB7A-FDA5F315BC48}"/>
+              </a:ext>
+            </a:extLst>
+          </p:cNvPr>
           <p:cNvSpPr>
             <a:spLocks noGrp="1"/>
           </p:cNvSpPr>
@@ -4623,8 +4786,8 @@
         </p:nvSpPr>
         <p:spPr>
           <a:xfrm>
-            <a:off x="1792288" y="612775"/>
-            <a:ext cx="5486400" cy="4114800"/>
+            <a:off x="5183188" y="987425"/>
+            <a:ext cx="6172200" cy="4873625"/>
           </a:xfrm>
         </p:spPr>
         <p:txBody>
@@ -4674,7 +4837,13 @@
       </p:sp>
       <p:sp>
         <p:nvSpPr>
-          <p:cNvPr id="4" name="Text Placeholder 3"/>
+          <p:cNvPr id="4" name="Text Placeholder 3">
+            <a:extLst>
+              <a:ext uri="{FF2B5EF4-FFF2-40B4-BE49-F238E27FC236}">
+                <a16:creationId xmlns:a16="http://schemas.microsoft.com/office/drawing/2014/main" id="{47AD8ED4-C988-7A6B-08A2-F0BE9C02F4CC}"/>
+              </a:ext>
+            </a:extLst>
+          </p:cNvPr>
           <p:cNvSpPr>
             <a:spLocks noGrp="1"/>
           </p:cNvSpPr>
@@ -4684,8 +4853,8 @@
         </p:nvSpPr>
         <p:spPr>
           <a:xfrm>
-            <a:off x="1792288" y="5367338"/>
-            <a:ext cx="5486400" cy="804862"/>
+            <a:off x="839788" y="2057400"/>
+            <a:ext cx="3932237" cy="3811588"/>
           </a:xfrm>
         </p:spPr>
         <p:txBody>
@@ -4693,39 +4862,39 @@
           <a:lstStyle>
             <a:lvl1pPr marL="0" indent="0">
               <a:buNone/>
-              <a:defRPr sz="1400"/>
+              <a:defRPr sz="1600"/>
             </a:lvl1pPr>
             <a:lvl2pPr marL="457200" indent="0">
               <a:buNone/>
-              <a:defRPr sz="1200"/>
+              <a:defRPr sz="1400"/>
             </a:lvl2pPr>
             <a:lvl3pPr marL="914400" indent="0">
               <a:buNone/>
-              <a:defRPr sz="1000"/>
+              <a:defRPr sz="1200"/>
             </a:lvl3pPr>
             <a:lvl4pPr marL="1371600" indent="0">
               <a:buNone/>
-              <a:defRPr sz="900"/>
+              <a:defRPr sz="1000"/>
             </a:lvl4pPr>
             <a:lvl5pPr marL="1828800" indent="0">
               <a:buNone/>
-              <a:defRPr sz="900"/>
+              <a:defRPr sz="1000"/>
             </a:lvl5pPr>
             <a:lvl6pPr marL="2286000" indent="0">
               <a:buNone/>
-              <a:defRPr sz="900"/>
+              <a:defRPr sz="1000"/>
             </a:lvl6pPr>
             <a:lvl7pPr marL="2743200" indent="0">
               <a:buNone/>
-              <a:defRPr sz="900"/>
+              <a:defRPr sz="1000"/>
             </a:lvl7pPr>
             <a:lvl8pPr marL="3200400" indent="0">
               <a:buNone/>
-              <a:defRPr sz="900"/>
+              <a:defRPr sz="1000"/>
             </a:lvl8pPr>
             <a:lvl9pPr marL="3657600" indent="0">
               <a:buNone/>
-              <a:defRPr sz="900"/>
+              <a:defRPr sz="1000"/>
             </a:lvl9pPr>
           </a:lstStyle>
           <a:p>
@@ -4739,7 +4908,13 @@
       </p:sp>
       <p:sp>
         <p:nvSpPr>
-          <p:cNvPr id="5" name="Date Placeholder 4"/>
+          <p:cNvPr id="5" name="Date Placeholder 4">
+            <a:extLst>
+              <a:ext uri="{FF2B5EF4-FFF2-40B4-BE49-F238E27FC236}">
+                <a16:creationId xmlns:a16="http://schemas.microsoft.com/office/drawing/2014/main" id="{FAF01025-0B08-190A-602F-3BD0899ED2C4}"/>
+              </a:ext>
+            </a:extLst>
+          </p:cNvPr>
           <p:cNvSpPr>
             <a:spLocks noGrp="1"/>
           </p:cNvSpPr>
@@ -4754,7 +4929,7 @@
           <a:p>
             <a:fld id="{5BCAD085-E8A6-8845-BD4E-CB4CCA059FC4}" type="datetimeFigureOut">
               <a:rPr lang="en-US" smtClean="0"/>
-              <a:t>9/23/2026</a:t>
+              <a:t>9/25/2026</a:t>
             </a:fld>
             <a:endParaRPr lang="en-US"/>
           </a:p>
@@ -4762,7 +4937,13 @@
       </p:sp>
       <p:sp>
         <p:nvSpPr>
-          <p:cNvPr id="6" name="Footer Placeholder 5"/>
+          <p:cNvPr id="6" name="Footer Placeholder 5">
+            <a:extLst>
+              <a:ext uri="{FF2B5EF4-FFF2-40B4-BE49-F238E27FC236}">
+                <a16:creationId xmlns:a16="http://schemas.microsoft.com/office/drawing/2014/main" id="{879F9A25-40BB-5D89-8854-4428A4422533}"/>
+              </a:ext>
+            </a:extLst>
+          </p:cNvPr>
           <p:cNvSpPr>
             <a:spLocks noGrp="1"/>
           </p:cNvSpPr>
@@ -4781,7 +4962,13 @@
       </p:sp>
       <p:sp>
         <p:nvSpPr>
-          <p:cNvPr id="7" name="Slide Number Placeholder 6"/>
+          <p:cNvPr id="7" name="Slide Number Placeholder 6">
+            <a:extLst>
+              <a:ext uri="{FF2B5EF4-FFF2-40B4-BE49-F238E27FC236}">
+                <a16:creationId xmlns:a16="http://schemas.microsoft.com/office/drawing/2014/main" id="{438D5F96-F0E4-E2BC-9526-365F03417197}"/>
+              </a:ext>
+            </a:extLst>
+          </p:cNvPr>
           <p:cNvSpPr>
             <a:spLocks noGrp="1"/>
           </p:cNvSpPr>
@@ -4805,7 +4992,7 @@
     </p:spTree>
     <p:extLst>
       <p:ext uri="{BB962C8B-B14F-4D97-AF65-F5344CB8AC3E}">
-        <p14:creationId xmlns:p14="http://schemas.microsoft.com/office/powerpoint/2010/main" val="3889236939"/>
+        <p14:creationId xmlns:p14="http://schemas.microsoft.com/office/powerpoint/2010/main" val="3588742311"/>
       </p:ext>
     </p:extLst>
   </p:cSld>
@@ -4839,7 +5026,13 @@
       </p:grpSpPr>
       <p:sp>
         <p:nvSpPr>
-          <p:cNvPr id="2" name="Title Placeholder 1"/>
+          <p:cNvPr id="2" name="Title Placeholder 1">
+            <a:extLst>
+              <a:ext uri="{FF2B5EF4-FFF2-40B4-BE49-F238E27FC236}">
+                <a16:creationId xmlns:a16="http://schemas.microsoft.com/office/drawing/2014/main" id="{51E023F1-A68E-4FD7-5519-F769CA85B734}"/>
+              </a:ext>
+            </a:extLst>
+          </p:cNvPr>
           <p:cNvSpPr>
             <a:spLocks noGrp="1"/>
           </p:cNvSpPr>
@@ -4849,8 +5042,8 @@
         </p:nvSpPr>
         <p:spPr>
           <a:xfrm>
-            <a:off x="457200" y="274638"/>
-            <a:ext cx="8229600" cy="1143000"/>
+            <a:off x="838200" y="365125"/>
+            <a:ext cx="10515600" cy="1325563"/>
           </a:xfrm>
           <a:prstGeom prst="rect">
             <a:avLst/>
@@ -4871,7 +5064,13 @@
       </p:sp>
       <p:sp>
         <p:nvSpPr>
-          <p:cNvPr id="3" name="Text Placeholder 2"/>
+          <p:cNvPr id="3" name="Text Placeholder 2">
+            <a:extLst>
+              <a:ext uri="{FF2B5EF4-FFF2-40B4-BE49-F238E27FC236}">
+                <a16:creationId xmlns:a16="http://schemas.microsoft.com/office/drawing/2014/main" id="{42B7B01A-8EB1-564B-324C-A547AE81EDC2}"/>
+              </a:ext>
+            </a:extLst>
+          </p:cNvPr>
           <p:cNvSpPr>
             <a:spLocks noGrp="1"/>
           </p:cNvSpPr>
@@ -4881,8 +5080,8 @@
         </p:nvSpPr>
         <p:spPr>
           <a:xfrm>
-            <a:off x="457200" y="1600200"/>
-            <a:ext cx="8229600" cy="4525963"/>
+            <a:off x="838200" y="1825625"/>
+            <a:ext cx="10515600" cy="4351338"/>
           </a:xfrm>
           <a:prstGeom prst="rect">
             <a:avLst/>
@@ -4932,7 +5131,13 @@
       </p:sp>
       <p:sp>
         <p:nvSpPr>
-          <p:cNvPr id="4" name="Date Placeholder 3"/>
+          <p:cNvPr id="4" name="Date Placeholder 3">
+            <a:extLst>
+              <a:ext uri="{FF2B5EF4-FFF2-40B4-BE49-F238E27FC236}">
+                <a16:creationId xmlns:a16="http://schemas.microsoft.com/office/drawing/2014/main" id="{715B3F5C-2AAC-8900-6A9A-9D779FB2531E}"/>
+              </a:ext>
+            </a:extLst>
+          </p:cNvPr>
           <p:cNvSpPr>
             <a:spLocks noGrp="1"/>
           </p:cNvSpPr>
@@ -4942,8 +5147,8 @@
         </p:nvSpPr>
         <p:spPr>
           <a:xfrm>
-            <a:off x="457200" y="6356350"/>
-            <a:ext cx="2133600" cy="365125"/>
+            <a:off x="838200" y="6356350"/>
+            <a:ext cx="2743200" cy="365125"/>
           </a:xfrm>
           <a:prstGeom prst="rect">
             <a:avLst/>
@@ -4956,7 +5161,7 @@
               <a:defRPr sz="1200">
                 <a:solidFill>
                   <a:schemeClr val="tx1">
-                    <a:tint val="75000"/>
+                    <a:tint val="82000"/>
                   </a:schemeClr>
                 </a:solidFill>
               </a:defRPr>
@@ -4965,7 +5170,7 @@
           <a:p>
             <a:fld id="{5BCAD085-E8A6-8845-BD4E-CB4CCA059FC4}" type="datetimeFigureOut">
               <a:rPr lang="en-US" smtClean="0"/>
-              <a:t>9/23/2026</a:t>
+              <a:t>9/25/2026</a:t>
             </a:fld>
             <a:endParaRPr lang="en-US"/>
           </a:p>
@@ -4973,7 +5178,13 @@
       </p:sp>
       <p:sp>
         <p:nvSpPr>
-          <p:cNvPr id="5" name="Footer Placeholder 4"/>
+          <p:cNvPr id="5" name="Footer Placeholder 4">
+            <a:extLst>
+              <a:ext uri="{FF2B5EF4-FFF2-40B4-BE49-F238E27FC236}">
+                <a16:creationId xmlns:a16="http://schemas.microsoft.com/office/drawing/2014/main" id="{7B17E0C4-52BF-146B-AD22-0FC34EFE07AF}"/>
+              </a:ext>
+            </a:extLst>
+          </p:cNvPr>
           <p:cNvSpPr>
             <a:spLocks noGrp="1"/>
           </p:cNvSpPr>
@@ -4983,8 +5194,8 @@
         </p:nvSpPr>
         <p:spPr>
           <a:xfrm>
-            <a:off x="3124200" y="6356350"/>
-            <a:ext cx="2895600" cy="365125"/>
+            <a:off x="4038600" y="6356350"/>
+            <a:ext cx="4114800" cy="365125"/>
           </a:xfrm>
           <a:prstGeom prst="rect">
             <a:avLst/>
@@ -4997,7 +5208,7 @@
               <a:defRPr sz="1200">
                 <a:solidFill>
                   <a:schemeClr val="tx1">
-                    <a:tint val="75000"/>
+                    <a:tint val="82000"/>
                   </a:schemeClr>
                 </a:solidFill>
               </a:defRPr>
@@ -5010,7 +5221,13 @@
       </p:sp>
       <p:sp>
         <p:nvSpPr>
-          <p:cNvPr id="6" name="Slide Number Placeholder 5"/>
+          <p:cNvPr id="6" name="Slide Number Placeholder 5">
+            <a:extLst>
+              <a:ext uri="{FF2B5EF4-FFF2-40B4-BE49-F238E27FC236}">
+                <a16:creationId xmlns:a16="http://schemas.microsoft.com/office/drawing/2014/main" id="{83560E55-B795-EEA7-2012-D10BD209624C}"/>
+              </a:ext>
+            </a:extLst>
+          </p:cNvPr>
           <p:cNvSpPr>
             <a:spLocks noGrp="1"/>
           </p:cNvSpPr>
@@ -5020,8 +5237,8 @@
         </p:nvSpPr>
         <p:spPr>
           <a:xfrm>
-            <a:off x="6553200" y="6356350"/>
-            <a:ext cx="2133600" cy="365125"/>
+            <a:off x="8610600" y="6356350"/>
+            <a:ext cx="2743200" cy="365125"/>
           </a:xfrm>
           <a:prstGeom prst="rect">
             <a:avLst/>
@@ -5034,7 +5251,7 @@
               <a:defRPr sz="1200">
                 <a:solidFill>
                   <a:schemeClr val="tx1">
-                    <a:tint val="75000"/>
+                    <a:tint val="82000"/>
                   </a:schemeClr>
                 </a:solidFill>
               </a:defRPr>
@@ -5052,27 +5269,30 @@
     </p:spTree>
     <p:extLst>
       <p:ext uri="{BB962C8B-B14F-4D97-AF65-F5344CB8AC3E}">
-        <p14:creationId xmlns:p14="http://schemas.microsoft.com/office/powerpoint/2010/main" val="2209977519"/>
+        <p14:creationId xmlns:p14="http://schemas.microsoft.com/office/powerpoint/2010/main" val="3030971177"/>
       </p:ext>
     </p:extLst>
   </p:cSld>
   <p:clrMap bg1="lt1" tx1="dk1" bg2="lt2" tx2="dk2" accent1="accent1" accent2="accent2" accent3="accent3" accent4="accent4" accent5="accent5" accent6="accent6" hlink="hlink" folHlink="folHlink"/>
   <p:sldLayoutIdLst>
-    <p:sldLayoutId id="2147483649" r:id="rId1"/>
-    <p:sldLayoutId id="2147483650" r:id="rId2"/>
-    <p:sldLayoutId id="2147483651" r:id="rId3"/>
-    <p:sldLayoutId id="2147483652" r:id="rId4"/>
-    <p:sldLayoutId id="2147483653" r:id="rId5"/>
-    <p:sldLayoutId id="2147483654" r:id="rId6"/>
-    <p:sldLayoutId id="2147483655" r:id="rId7"/>
-    <p:sldLayoutId id="2147483656" r:id="rId8"/>
-    <p:sldLayoutId id="2147483657" r:id="rId9"/>
-    <p:sldLayoutId id="2147483658" r:id="rId10"/>
-    <p:sldLayoutId id="2147483659" r:id="rId11"/>
+    <p:sldLayoutId id="2147483661" r:id="rId1"/>
+    <p:sldLayoutId id="2147483662" r:id="rId2"/>
+    <p:sldLayoutId id="2147483663" r:id="rId3"/>
+    <p:sldLayoutId id="2147483664" r:id="rId4"/>
+    <p:sldLayoutId id="2147483665" r:id="rId5"/>
+    <p:sldLayoutId id="2147483666" r:id="rId6"/>
+    <p:sldLayoutId id="2147483667" r:id="rId7"/>
+    <p:sldLayoutId id="2147483668" r:id="rId8"/>
+    <p:sldLayoutId id="2147483669" r:id="rId9"/>
+    <p:sldLayoutId id="2147483670" r:id="rId10"/>
+    <p:sldLayoutId id="2147483671" r:id="rId11"/>
   </p:sldLayoutIdLst>
   <p:txStyles>
     <p:titleStyle>
-      <a:lvl1pPr algn="ctr" defTabSz="457200" rtl="0" eaLnBrk="1" latinLnBrk="0" hangingPunct="1">
+      <a:lvl1pPr algn="l" defTabSz="914400" rtl="0" eaLnBrk="1" latinLnBrk="0" hangingPunct="1">
+        <a:lnSpc>
+          <a:spcPct val="90000"/>
+        </a:lnSpc>
         <a:spcBef>
           <a:spcPct val="0"/>
         </a:spcBef>
@@ -5088,13 +5308,16 @@
       </a:lvl1pPr>
     </p:titleStyle>
     <p:bodyStyle>
-      <a:lvl1pPr marL="342900" indent="-342900" algn="l" defTabSz="457200" rtl="0" eaLnBrk="1" latinLnBrk="0" hangingPunct="1">
+      <a:lvl1pPr marL="228600" indent="-228600" algn="l" defTabSz="914400" rtl="0" eaLnBrk="1" latinLnBrk="0" hangingPunct="1">
+        <a:lnSpc>
+          <a:spcPct val="90000"/>
+        </a:lnSpc>
         <a:spcBef>
-          <a:spcPct val="20000"/>
+          <a:spcPts val="1000"/>
         </a:spcBef>
-        <a:buFont typeface="Arial"/>
+        <a:buFont typeface="Arial" panose="020B0604020202020204" pitchFamily="34" charset="0"/>
         <a:buChar char="•"/>
-        <a:defRPr sz="3200" kern="1200">
+        <a:defRPr sz="2800" kern="1200">
           <a:solidFill>
             <a:schemeClr val="tx1"/>
           </a:solidFill>
@@ -5103,13 +5326,16 @@
           <a:cs typeface="+mn-cs"/>
         </a:defRPr>
       </a:lvl1pPr>
-      <a:lvl2pPr marL="742950" indent="-285750" algn="l" defTabSz="457200" rtl="0" eaLnBrk="1" latinLnBrk="0" hangingPunct="1">
+      <a:lvl2pPr marL="685800" indent="-228600" algn="l" defTabSz="914400" rtl="0" eaLnBrk="1" latinLnBrk="0" hangingPunct="1">
+        <a:lnSpc>
+          <a:spcPct val="90000"/>
+        </a:lnSpc>
         <a:spcBef>
-          <a:spcPct val="20000"/>
+          <a:spcPts val="500"/>
         </a:spcBef>
-        <a:buFont typeface="Arial"/>
-        <a:buChar char="–"/>
-        <a:defRPr sz="2800" kern="1200">
+        <a:buFont typeface="Arial" panose="020B0604020202020204" pitchFamily="34" charset="0"/>
+        <a:buChar char="•"/>
+        <a:defRPr sz="2400" kern="1200">
           <a:solidFill>
             <a:schemeClr val="tx1"/>
           </a:solidFill>
@@ -5118,13 +5344,16 @@
           <a:cs typeface="+mn-cs"/>
         </a:defRPr>
       </a:lvl2pPr>
-      <a:lvl3pPr marL="1143000" indent="-228600" algn="l" defTabSz="457200" rtl="0" eaLnBrk="1" latinLnBrk="0" hangingPunct="1">
+      <a:lvl3pPr marL="1143000" indent="-228600" algn="l" defTabSz="914400" rtl="0" eaLnBrk="1" latinLnBrk="0" hangingPunct="1">
+        <a:lnSpc>
+          <a:spcPct val="90000"/>
+        </a:lnSpc>
         <a:spcBef>
-          <a:spcPct val="20000"/>
+          <a:spcPts val="500"/>
         </a:spcBef>
-        <a:buFont typeface="Arial"/>
+        <a:buFont typeface="Arial" panose="020B0604020202020204" pitchFamily="34" charset="0"/>
         <a:buChar char="•"/>
-        <a:defRPr sz="2400" kern="1200">
+        <a:defRPr sz="2000" kern="1200">
           <a:solidFill>
             <a:schemeClr val="tx1"/>
           </a:solidFill>
@@ -5133,13 +5362,16 @@
           <a:cs typeface="+mn-cs"/>
         </a:defRPr>
       </a:lvl3pPr>
-      <a:lvl4pPr marL="1600200" indent="-228600" algn="l" defTabSz="457200" rtl="0" eaLnBrk="1" latinLnBrk="0" hangingPunct="1">
+      <a:lvl4pPr marL="1600200" indent="-228600" algn="l" defTabSz="914400" rtl="0" eaLnBrk="1" latinLnBrk="0" hangingPunct="1">
+        <a:lnSpc>
+          <a:spcPct val="90000"/>
+        </a:lnSpc>
         <a:spcBef>
-          <a:spcPct val="20000"/>
+          <a:spcPts val="500"/>
         </a:spcBef>
-        <a:buFont typeface="Arial"/>
-        <a:buChar char="–"/>
-        <a:defRPr sz="2000" kern="1200">
+        <a:buFont typeface="Arial" panose="020B0604020202020204" pitchFamily="34" charset="0"/>
+        <a:buChar char="•"/>
+        <a:defRPr sz="1800" kern="1200">
           <a:solidFill>
             <a:schemeClr val="tx1"/>
           </a:solidFill>
@@ -5148,13 +5380,16 @@
           <a:cs typeface="+mn-cs"/>
         </a:defRPr>
       </a:lvl4pPr>
-      <a:lvl5pPr marL="2057400" indent="-228600" algn="l" defTabSz="457200" rtl="0" eaLnBrk="1" latinLnBrk="0" hangingPunct="1">
+      <a:lvl5pPr marL="2057400" indent="-228600" algn="l" defTabSz="914400" rtl="0" eaLnBrk="1" latinLnBrk="0" hangingPunct="1">
+        <a:lnSpc>
+          <a:spcPct val="90000"/>
+        </a:lnSpc>
         <a:spcBef>
-          <a:spcPct val="20000"/>
+          <a:spcPts val="500"/>
         </a:spcBef>
-        <a:buFont typeface="Arial"/>
-        <a:buChar char="»"/>
-        <a:defRPr sz="2000" kern="1200">
+        <a:buFont typeface="Arial" panose="020B0604020202020204" pitchFamily="34" charset="0"/>
+        <a:buChar char="•"/>
+        <a:defRPr sz="1800" kern="1200">
           <a:solidFill>
             <a:schemeClr val="tx1"/>
           </a:solidFill>
@@ -5163,13 +5398,16 @@
           <a:cs typeface="+mn-cs"/>
         </a:defRPr>
       </a:lvl5pPr>
-      <a:lvl6pPr marL="2514600" indent="-228600" algn="l" defTabSz="457200" rtl="0" eaLnBrk="1" latinLnBrk="0" hangingPunct="1">
+      <a:lvl6pPr marL="2514600" indent="-228600" algn="l" defTabSz="914400" rtl="0" eaLnBrk="1" latinLnBrk="0" hangingPunct="1">
+        <a:lnSpc>
+          <a:spcPct val="90000"/>
+        </a:lnSpc>
         <a:spcBef>
-          <a:spcPct val="20000"/>
+          <a:spcPts val="500"/>
         </a:spcBef>
-        <a:buFont typeface="Arial"/>
+        <a:buFont typeface="Arial" panose="020B0604020202020204" pitchFamily="34" charset="0"/>
         <a:buChar char="•"/>
-        <a:defRPr sz="2000" kern="1200">
+        <a:defRPr sz="1800" kern="1200">
           <a:solidFill>
             <a:schemeClr val="tx1"/>
           </a:solidFill>
@@ -5178,13 +5416,16 @@
           <a:cs typeface="+mn-cs"/>
         </a:defRPr>
       </a:lvl6pPr>
-      <a:lvl7pPr marL="2971800" indent="-228600" algn="l" defTabSz="457200" rtl="0" eaLnBrk="1" latinLnBrk="0" hangingPunct="1">
+      <a:lvl7pPr marL="2971800" indent="-228600" algn="l" defTabSz="914400" rtl="0" eaLnBrk="1" latinLnBrk="0" hangingPunct="1">
+        <a:lnSpc>
+          <a:spcPct val="90000"/>
+        </a:lnSpc>
         <a:spcBef>
-          <a:spcPct val="20000"/>
+          <a:spcPts val="500"/>
         </a:spcBef>
-        <a:buFont typeface="Arial"/>
+        <a:buFont typeface="Arial" panose="020B0604020202020204" pitchFamily="34" charset="0"/>
         <a:buChar char="•"/>
-        <a:defRPr sz="2000" kern="1200">
+        <a:defRPr sz="1800" kern="1200">
           <a:solidFill>
             <a:schemeClr val="tx1"/>
           </a:solidFill>
@@ -5193,13 +5434,16 @@
           <a:cs typeface="+mn-cs"/>
         </a:defRPr>
       </a:lvl7pPr>
-      <a:lvl8pPr marL="3429000" indent="-228600" algn="l" defTabSz="457200" rtl="0" eaLnBrk="1" latinLnBrk="0" hangingPunct="1">
+      <a:lvl8pPr marL="3429000" indent="-228600" algn="l" defTabSz="914400" rtl="0" eaLnBrk="1" latinLnBrk="0" hangingPunct="1">
+        <a:lnSpc>
+          <a:spcPct val="90000"/>
+        </a:lnSpc>
         <a:spcBef>
-          <a:spcPct val="20000"/>
+          <a:spcPts val="500"/>
         </a:spcBef>
-        <a:buFont typeface="Arial"/>
+        <a:buFont typeface="Arial" panose="020B0604020202020204" pitchFamily="34" charset="0"/>
         <a:buChar char="•"/>
-        <a:defRPr sz="2000" kern="1200">
+        <a:defRPr sz="1800" kern="1200">
           <a:solidFill>
             <a:schemeClr val="tx1"/>
           </a:solidFill>
@@ -5208,13 +5452,16 @@
           <a:cs typeface="+mn-cs"/>
         </a:defRPr>
       </a:lvl8pPr>
-      <a:lvl9pPr marL="3886200" indent="-228600" algn="l" defTabSz="457200" rtl="0" eaLnBrk="1" latinLnBrk="0" hangingPunct="1">
+      <a:lvl9pPr marL="3886200" indent="-228600" algn="l" defTabSz="914400" rtl="0" eaLnBrk="1" latinLnBrk="0" hangingPunct="1">
+        <a:lnSpc>
+          <a:spcPct val="90000"/>
+        </a:lnSpc>
         <a:spcBef>
-          <a:spcPct val="20000"/>
+          <a:spcPts val="500"/>
         </a:spcBef>
-        <a:buFont typeface="Arial"/>
+        <a:buFont typeface="Arial" panose="020B0604020202020204" pitchFamily="34" charset="0"/>
         <a:buChar char="•"/>
-        <a:defRPr sz="2000" kern="1200">
+        <a:defRPr sz="1800" kern="1200">
           <a:solidFill>
             <a:schemeClr val="tx1"/>
           </a:solidFill>
@@ -5228,7 +5475,7 @@
       <a:defPPr>
         <a:defRPr lang="en-US"/>
       </a:defPPr>
-      <a:lvl1pPr marL="0" algn="l" defTabSz="457200" rtl="0" eaLnBrk="1" latinLnBrk="0" hangingPunct="1">
+      <a:lvl1pPr marL="0" algn="l" defTabSz="914400" rtl="0" eaLnBrk="1" latinLnBrk="0" hangingPunct="1">
         <a:defRPr sz="1800" kern="1200">
           <a:solidFill>
             <a:schemeClr val="tx1"/>
@@ -5238,7 +5485,7 @@
           <a:cs typeface="+mn-cs"/>
         </a:defRPr>
       </a:lvl1pPr>
-      <a:lvl2pPr marL="457200" algn="l" defTabSz="457200" rtl="0" eaLnBrk="1" latinLnBrk="0" hangingPunct="1">
+      <a:lvl2pPr marL="457200" algn="l" defTabSz="914400" rtl="0" eaLnBrk="1" latinLnBrk="0" hangingPunct="1">
         <a:defRPr sz="1800" kern="1200">
           <a:solidFill>
             <a:schemeClr val="tx1"/>
@@ -5248,7 +5495,7 @@
           <a:cs typeface="+mn-cs"/>
         </a:defRPr>
       </a:lvl2pPr>
-      <a:lvl3pPr marL="914400" algn="l" defTabSz="457200" rtl="0" eaLnBrk="1" latinLnBrk="0" hangingPunct="1">
+      <a:lvl3pPr marL="914400" algn="l" defTabSz="914400" rtl="0" eaLnBrk="1" latinLnBrk="0" hangingPunct="1">
         <a:defRPr sz="1800" kern="1200">
           <a:solidFill>
             <a:schemeClr val="tx1"/>
@@ -5258,7 +5505,7 @@
           <a:cs typeface="+mn-cs"/>
         </a:defRPr>
       </a:lvl3pPr>
-      <a:lvl4pPr marL="1371600" algn="l" defTabSz="457200" rtl="0" eaLnBrk="1" latinLnBrk="0" hangingPunct="1">
+      <a:lvl4pPr marL="1371600" algn="l" defTabSz="914400" rtl="0" eaLnBrk="1" latinLnBrk="0" hangingPunct="1">
         <a:defRPr sz="1800" kern="1200">
           <a:solidFill>
             <a:schemeClr val="tx1"/>
@@ -5268,7 +5515,7 @@
           <a:cs typeface="+mn-cs"/>
         </a:defRPr>
       </a:lvl4pPr>
-      <a:lvl5pPr marL="1828800" algn="l" defTabSz="457200" rtl="0" eaLnBrk="1" latinLnBrk="0" hangingPunct="1">
+      <a:lvl5pPr marL="1828800" algn="l" defTabSz="914400" rtl="0" eaLnBrk="1" latinLnBrk="0" hangingPunct="1">
         <a:defRPr sz="1800" kern="1200">
           <a:solidFill>
             <a:schemeClr val="tx1"/>
@@ -5278,7 +5525,7 @@
           <a:cs typeface="+mn-cs"/>
         </a:defRPr>
       </a:lvl5pPr>
-      <a:lvl6pPr marL="2286000" algn="l" defTabSz="457200" rtl="0" eaLnBrk="1" latinLnBrk="0" hangingPunct="1">
+      <a:lvl6pPr marL="2286000" algn="l" defTabSz="914400" rtl="0" eaLnBrk="1" latinLnBrk="0" hangingPunct="1">
         <a:defRPr sz="1800" kern="1200">
           <a:solidFill>
             <a:schemeClr val="tx1"/>
@@ -5288,7 +5535,7 @@
           <a:cs typeface="+mn-cs"/>
         </a:defRPr>
       </a:lvl6pPr>
-      <a:lvl7pPr marL="2743200" algn="l" defTabSz="457200" rtl="0" eaLnBrk="1" latinLnBrk="0" hangingPunct="1">
+      <a:lvl7pPr marL="2743200" algn="l" defTabSz="914400" rtl="0" eaLnBrk="1" latinLnBrk="0" hangingPunct="1">
         <a:defRPr sz="1800" kern="1200">
           <a:solidFill>
             <a:schemeClr val="tx1"/>
@@ -5298,7 +5545,7 @@
           <a:cs typeface="+mn-cs"/>
         </a:defRPr>
       </a:lvl7pPr>
-      <a:lvl8pPr marL="3200400" algn="l" defTabSz="457200" rtl="0" eaLnBrk="1" latinLnBrk="0" hangingPunct="1">
+      <a:lvl8pPr marL="3200400" algn="l" defTabSz="914400" rtl="0" eaLnBrk="1" latinLnBrk="0" hangingPunct="1">
         <a:defRPr sz="1800" kern="1200">
           <a:solidFill>
             <a:schemeClr val="tx1"/>
@@ -5308,7 +5555,7 @@
           <a:cs typeface="+mn-cs"/>
         </a:defRPr>
       </a:lvl8pPr>
-      <a:lvl9pPr marL="3657600" algn="l" defTabSz="457200" rtl="0" eaLnBrk="1" latinLnBrk="0" hangingPunct="1">
+      <a:lvl9pPr marL="3657600" algn="l" defTabSz="914400" rtl="0" eaLnBrk="1" latinLnBrk="0" hangingPunct="1">
         <a:defRPr sz="1800" kern="1200">
           <a:solidFill>
             <a:schemeClr val="tx1"/>
@@ -9837,7 +10084,7 @@
               </a:spcAft>
             </a:pPr>
             <a:r>
-              <a:rPr sz="1520" b="1">
+              <a:rPr sz="1520" b="1" dirty="0">
                 <a:solidFill>
                   <a:srgbClr val="50D2C2"/>
                 </a:solidFill>
@@ -9846,13 +10093,22 @@
               <a:t>✓  </a:t>
             </a:r>
             <a:r>
-              <a:rPr sz="1520">
+              <a:rPr sz="1520" dirty="0" err="1">
                 <a:solidFill>
                   <a:srgbClr val="F7F3EA"/>
                 </a:solidFill>
                 <a:latin typeface="Aptos"/>
               </a:rPr>
-              <a:t>Висока cohesion</a:t>
+              <a:t>Висока</a:t>
+            </a:r>
+            <a:r>
+              <a:rPr sz="1520" dirty="0">
+                <a:solidFill>
+                  <a:srgbClr val="F7F3EA"/>
+                </a:solidFill>
+                <a:latin typeface="Aptos"/>
+              </a:rPr>
+              <a:t> cohesion</a:t>
             </a:r>
           </a:p>
           <a:p>
@@ -9865,7 +10121,7 @@
               </a:spcAft>
             </a:pPr>
             <a:r>
-              <a:rPr sz="1520" b="1">
+              <a:rPr sz="1520" b="1" dirty="0">
                 <a:solidFill>
                   <a:srgbClr val="50D2C2"/>
                 </a:solidFill>
@@ -9874,13 +10130,22 @@
               <a:t>✓  </a:t>
             </a:r>
             <a:r>
-              <a:rPr sz="1520">
+              <a:rPr sz="1520" dirty="0" err="1">
                 <a:solidFill>
                   <a:srgbClr val="F7F3EA"/>
                 </a:solidFill>
                 <a:latin typeface="Aptos"/>
               </a:rPr>
-              <a:t>По-малко coupling</a:t>
+              <a:t>По-малко</a:t>
+            </a:r>
+            <a:r>
+              <a:rPr sz="1520" dirty="0">
+                <a:solidFill>
+                  <a:srgbClr val="F7F3EA"/>
+                </a:solidFill>
+                <a:latin typeface="Aptos"/>
+              </a:rPr>
+              <a:t> coupling</a:t>
             </a:r>
           </a:p>
           <a:p>
@@ -9893,7 +10158,7 @@
               </a:spcAft>
             </a:pPr>
             <a:r>
-              <a:rPr sz="1520" b="1">
+              <a:rPr sz="1520" b="1" dirty="0">
                 <a:solidFill>
                   <a:srgbClr val="50D2C2"/>
                 </a:solidFill>
@@ -9902,14 +10167,38 @@
               <a:t>✓  </a:t>
             </a:r>
             <a:r>
-              <a:rPr sz="1520">
+              <a:rPr sz="1520" dirty="0" err="1">
                 <a:solidFill>
                   <a:srgbClr val="F7F3EA"/>
                 </a:solidFill>
                 <a:latin typeface="Aptos"/>
               </a:rPr>
-              <a:t>Лесна навигация</a:t>
-            </a:r>
+              <a:t>Лесна</a:t>
+            </a:r>
+            <a:r>
+              <a:rPr sz="1520" dirty="0">
+                <a:solidFill>
+                  <a:srgbClr val="F7F3EA"/>
+                </a:solidFill>
+                <a:latin typeface="Aptos"/>
+              </a:rPr>
+              <a:t> </a:t>
+            </a:r>
+            <a:r>
+              <a:rPr sz="1520" dirty="0" err="1">
+                <a:solidFill>
+                  <a:srgbClr val="F7F3EA"/>
+                </a:solidFill>
+                <a:latin typeface="Aptos"/>
+              </a:rPr>
+              <a:t>навигация</a:t>
+            </a:r>
+            <a:endParaRPr sz="1520" dirty="0">
+              <a:solidFill>
+                <a:srgbClr val="F7F3EA"/>
+              </a:solidFill>
+              <a:latin typeface="Aptos"/>
+            </a:endParaRPr>
           </a:p>
           <a:p>
             <a:pPr>
@@ -9921,7 +10210,7 @@
               </a:spcAft>
             </a:pPr>
             <a:r>
-              <a:rPr sz="1520" b="1">
+              <a:rPr sz="1520" b="1" dirty="0">
                 <a:solidFill>
                   <a:srgbClr val="50D2C2"/>
                 </a:solidFill>
@@ -9930,7 +10219,7 @@
               <a:t>✓  </a:t>
             </a:r>
             <a:r>
-              <a:rPr sz="1520">
+              <a:rPr sz="1520" dirty="0">
                 <a:solidFill>
                   <a:srgbClr val="F7F3EA"/>
                 </a:solidFill>
@@ -9949,7 +10238,7 @@
               </a:spcAft>
             </a:pPr>
             <a:r>
-              <a:rPr sz="1520" b="1">
+              <a:rPr sz="1520" b="1" dirty="0">
                 <a:solidFill>
                   <a:srgbClr val="50D2C2"/>
                 </a:solidFill>
@@ -9958,14 +10247,38 @@
               <a:t>✓  </a:t>
             </a:r>
             <a:r>
-              <a:rPr sz="1520">
+              <a:rPr sz="1520" dirty="0" err="1">
                 <a:solidFill>
                   <a:srgbClr val="F7F3EA"/>
                 </a:solidFill>
                 <a:latin typeface="Aptos"/>
               </a:rPr>
-              <a:t>Малки reviewable промени</a:t>
-            </a:r>
+              <a:t>Малки</a:t>
+            </a:r>
+            <a:r>
+              <a:rPr sz="1520" dirty="0">
+                <a:solidFill>
+                  <a:srgbClr val="F7F3EA"/>
+                </a:solidFill>
+                <a:latin typeface="Aptos"/>
+              </a:rPr>
+              <a:t> reviewable </a:t>
+            </a:r>
+            <a:r>
+              <a:rPr sz="1520" dirty="0" err="1">
+                <a:solidFill>
+                  <a:srgbClr val="F7F3EA"/>
+                </a:solidFill>
+                <a:latin typeface="Aptos"/>
+              </a:rPr>
+              <a:t>промени</a:t>
+            </a:r>
+            <a:endParaRPr sz="1520" dirty="0">
+              <a:solidFill>
+                <a:srgbClr val="F7F3EA"/>
+              </a:solidFill>
+              <a:latin typeface="Aptos"/>
+            </a:endParaRPr>
           </a:p>
         </p:txBody>
       </p:sp>
@@ -23192,7 +23505,49 @@
         <p:spPr>
           <a:xfrm>
             <a:off x="2633472" y="1938528"/>
-            <a:ext cx="8183879" cy="384048"/>
+            <a:ext cx="8183879" cy="230832"/>
+          </a:xfrm>
+          <a:prstGeom prst="rect">
+            <a:avLst/>
+          </a:prstGeom>
+          <a:noFill/>
+        </p:spPr>
+        <p:txBody>
+          <a:bodyPr wrap="square" lIns="0" tIns="0" rIns="0" bIns="0" anchor="t">
+            <a:spAutoFit/>
+          </a:bodyPr>
+          <a:lstStyle/>
+          <a:p>
+            <a:r>
+              <a:rPr lang="en-US" sz="1500" b="1" i="0" dirty="0">
+                <a:solidFill>
+                  <a:srgbClr val="F7F3EA"/>
+                </a:solidFill>
+                <a:latin typeface="Cascadia Mono"/>
+                <a:hlinkClick r:id="rId3"/>
+              </a:rPr>
+              <a:t>https://github.com/teomihov/MovieTracker</a:t>
+            </a:r>
+            <a:endParaRPr sz="1500" b="1" i="0" dirty="0">
+              <a:solidFill>
+                <a:srgbClr val="F7F3EA"/>
+              </a:solidFill>
+              <a:latin typeface="Cascadia Mono"/>
+              <a:hlinkClick r:id="rId3"/>
+            </a:endParaRPr>
+          </a:p>
+        </p:txBody>
+      </p:sp>
+      <p:sp>
+        <p:nvSpPr>
+          <p:cNvPr id="22" name="TextBox 21"/>
+          <p:cNvSpPr txBox="1"/>
+          <p:nvPr/>
+        </p:nvSpPr>
+        <p:spPr>
+          <a:xfrm>
+            <a:off x="960120" y="2468880"/>
+            <a:ext cx="1536192" cy="219456"/>
           </a:xfrm>
           <a:prstGeom prst="rect">
             <a:avLst/>
@@ -23211,28 +23566,27 @@
               </a:spcAft>
             </a:pPr>
             <a:r>
-              <a:rPr sz="1500" b="1" i="0">
-                <a:solidFill>
-                  <a:srgbClr val="F7F3EA"/>
+              <a:rPr sz="1050" b="1" i="0">
+                <a:solidFill>
+                  <a:srgbClr val="F4C95D"/>
                 </a:solidFill>
                 <a:latin typeface="Cascadia Mono"/>
-                <a:hlinkClick r:id="rId3"/>
-              </a:rPr>
-              <a:t>https://github.com/teomihov/TUMovieTracker</a:t>
-            </a:r>
-          </a:p>
-        </p:txBody>
-      </p:sp>
-      <p:sp>
-        <p:nvSpPr>
-          <p:cNvPr id="22" name="TextBox 21"/>
+              </a:rPr>
+              <a:t>SSH / CLONE</a:t>
+            </a:r>
+          </a:p>
+        </p:txBody>
+      </p:sp>
+      <p:sp>
+        <p:nvSpPr>
+          <p:cNvPr id="23" name="TextBox 22"/>
           <p:cNvSpPr txBox="1"/>
           <p:nvPr/>
         </p:nvSpPr>
         <p:spPr>
           <a:xfrm>
-            <a:off x="960120" y="2468880"/>
-            <a:ext cx="1536192" cy="219456"/>
+            <a:off x="2633472" y="2441448"/>
+            <a:ext cx="8183879" cy="203133"/>
           </a:xfrm>
           <a:prstGeom prst="rect">
             <a:avLst/>
@@ -23251,53 +23605,38 @@
               </a:spcAft>
             </a:pPr>
             <a:r>
-              <a:rPr sz="1050" b="1" i="0">
+              <a:rPr sz="1320" b="1" i="0" dirty="0" err="1">
                 <a:solidFill>
                   <a:srgbClr val="F4C95D"/>
                 </a:solidFill>
                 <a:latin typeface="Cascadia Mono"/>
               </a:rPr>
-              <a:t>SSH / CLONE</a:t>
-            </a:r>
-          </a:p>
-        </p:txBody>
-      </p:sp>
-      <p:sp>
-        <p:nvSpPr>
-          <p:cNvPr id="23" name="TextBox 22"/>
-          <p:cNvSpPr txBox="1"/>
-          <p:nvPr/>
-        </p:nvSpPr>
-        <p:spPr>
-          <a:xfrm>
-            <a:off x="2633472" y="2441448"/>
-            <a:ext cx="8183879" cy="310896"/>
-          </a:xfrm>
-          <a:prstGeom prst="rect">
-            <a:avLst/>
-          </a:prstGeom>
-          <a:noFill/>
-        </p:spPr>
-        <p:txBody>
-          <a:bodyPr wrap="square" lIns="0" tIns="0" rIns="0" bIns="0" anchor="t">
-            <a:spAutoFit/>
-          </a:bodyPr>
-          <a:lstStyle/>
-          <a:p>
-            <a:pPr algn="l">
-              <a:spcAft>
-                <a:spcPts val="0"/>
-              </a:spcAft>
-            </a:pPr>
-            <a:r>
-              <a:rPr sz="1320" b="1" i="0">
+              <a:t>git@github.com:teomihov</a:t>
+            </a:r>
+            <a:r>
+              <a:rPr sz="1320" b="1" i="0" dirty="0">
                 <a:solidFill>
                   <a:srgbClr val="F4C95D"/>
                 </a:solidFill>
                 <a:latin typeface="Cascadia Mono"/>
               </a:rPr>
-              <a:t>git@github.com:teomihov/TUMovieTracker.git</a:t>
-            </a:r>
+              <a:t>/</a:t>
+            </a:r>
+            <a:r>
+              <a:rPr sz="1320" b="1" i="0" dirty="0" err="1">
+                <a:solidFill>
+                  <a:srgbClr val="F4C95D"/>
+                </a:solidFill>
+                <a:latin typeface="Cascadia Mono"/>
+              </a:rPr>
+              <a:t>MovieTracker.git</a:t>
+            </a:r>
+            <a:endParaRPr sz="1320" b="1" i="0" dirty="0">
+              <a:solidFill>
+                <a:srgbClr val="F4C95D"/>
+              </a:solidFill>
+              <a:latin typeface="Cascadia Mono"/>
+            </a:endParaRPr>
           </a:p>
         </p:txBody>
       </p:sp>
@@ -24932,7 +25271,7 @@
         <p:spPr>
           <a:xfrm>
             <a:off x="923544" y="2304288"/>
-            <a:ext cx="6492240" cy="265176"/>
+            <a:ext cx="6492240" cy="187744"/>
           </a:xfrm>
           <a:prstGeom prst="rect">
             <a:avLst/>
@@ -24951,14 +25290,47 @@
               </a:spcAft>
             </a:pPr>
             <a:r>
-              <a:rPr sz="1220" b="0" i="0">
+              <a:rPr sz="1220" b="0" i="0" dirty="0">
                 <a:solidFill>
                   <a:srgbClr val="50D2C2"/>
                 </a:solidFill>
                 <a:latin typeface="Cascadia Mono"/>
               </a:rPr>
-              <a:t>git clone git@github.com:teomihov/TUMovieTracker.git</a:t>
-            </a:r>
+              <a:t>git clone </a:t>
+            </a:r>
+            <a:r>
+              <a:rPr sz="1220" b="0" i="0" dirty="0" err="1">
+                <a:solidFill>
+                  <a:srgbClr val="50D2C2"/>
+                </a:solidFill>
+                <a:latin typeface="Cascadia Mono"/>
+              </a:rPr>
+              <a:t>git@github.com:teomihov</a:t>
+            </a:r>
+            <a:r>
+              <a:rPr sz="1220" b="0" i="0" dirty="0">
+                <a:solidFill>
+                  <a:srgbClr val="50D2C2"/>
+                </a:solidFill>
+                <a:latin typeface="Cascadia Mono"/>
+              </a:rPr>
+              <a:t>/</a:t>
+            </a:r>
+            <a:r>
+              <a:rPr sz="1220" b="0" i="0" dirty="0" err="1">
+                <a:solidFill>
+                  <a:srgbClr val="50D2C2"/>
+                </a:solidFill>
+                <a:latin typeface="Cascadia Mono"/>
+              </a:rPr>
+              <a:t>MovieTracker.git</a:t>
+            </a:r>
+            <a:endParaRPr sz="1220" b="0" i="0" dirty="0">
+              <a:solidFill>
+                <a:srgbClr val="50D2C2"/>
+              </a:solidFill>
+              <a:latin typeface="Cascadia Mono"/>
+            </a:endParaRPr>
           </a:p>
         </p:txBody>
       </p:sp>
@@ -24971,7 +25343,7 @@
         <p:spPr>
           <a:xfrm>
             <a:off x="923544" y="2587752"/>
-            <a:ext cx="6492240" cy="265176"/>
+            <a:ext cx="6492240" cy="187744"/>
           </a:xfrm>
           <a:prstGeom prst="rect">
             <a:avLst/>
@@ -24990,14 +25362,29 @@
               </a:spcAft>
             </a:pPr>
             <a:r>
-              <a:rPr sz="1220" b="0" i="0">
+              <a:rPr sz="1220" b="0" i="0" dirty="0">
                 <a:solidFill>
                   <a:srgbClr val="F7F3EA"/>
                 </a:solidFill>
                 <a:latin typeface="Cascadia Mono"/>
               </a:rPr>
-              <a:t>cd TUMovieTracker</a:t>
-            </a:r>
+              <a:t>cd </a:t>
+            </a:r>
+            <a:r>
+              <a:rPr sz="1220" b="0" i="0" dirty="0" err="1">
+                <a:solidFill>
+                  <a:srgbClr val="F7F3EA"/>
+                </a:solidFill>
+                <a:latin typeface="Cascadia Mono"/>
+              </a:rPr>
+              <a:t>MovieTracker</a:t>
+            </a:r>
+            <a:endParaRPr sz="1220" b="0" i="0" dirty="0">
+              <a:solidFill>
+                <a:srgbClr val="F7F3EA"/>
+              </a:solidFill>
+              <a:latin typeface="Cascadia Mono"/>
+            </a:endParaRPr>
           </a:p>
         </p:txBody>
       </p:sp>
@@ -26924,13 +27311,220 @@
               </a:spcAft>
             </a:pPr>
             <a:r>
-              <a:rPr sz="1700" b="1" i="0">
+              <a:rPr sz="1700" b="1" i="0" dirty="0" err="1">
                 <a:solidFill>
                   <a:srgbClr val="F7F3EA"/>
                 </a:solidFill>
                 <a:latin typeface="Aptos Display"/>
               </a:rPr>
-              <a:t>Да ви помогна да мислите като инженери, не само да пишете код.</a:t>
+              <a:t>Да</a:t>
+            </a:r>
+            <a:r>
+              <a:rPr sz="1700" b="1" i="0" dirty="0">
+                <a:solidFill>
+                  <a:srgbClr val="F7F3EA"/>
+                </a:solidFill>
+                <a:latin typeface="Aptos Display"/>
+              </a:rPr>
+              <a:t> </a:t>
+            </a:r>
+            <a:r>
+              <a:rPr sz="1700" b="1" i="0" dirty="0" err="1">
+                <a:solidFill>
+                  <a:srgbClr val="F7F3EA"/>
+                </a:solidFill>
+                <a:latin typeface="Aptos Display"/>
+              </a:rPr>
+              <a:t>ви</a:t>
+            </a:r>
+            <a:r>
+              <a:rPr sz="1700" b="1" i="0" dirty="0">
+                <a:solidFill>
+                  <a:srgbClr val="F7F3EA"/>
+                </a:solidFill>
+                <a:latin typeface="Aptos Display"/>
+              </a:rPr>
+              <a:t> </a:t>
+            </a:r>
+            <a:r>
+              <a:rPr sz="1700" b="1" i="0" dirty="0" err="1">
+                <a:solidFill>
+                  <a:srgbClr val="F7F3EA"/>
+                </a:solidFill>
+                <a:latin typeface="Aptos Display"/>
+              </a:rPr>
+              <a:t>помогна</a:t>
+            </a:r>
+            <a:r>
+              <a:rPr sz="1700" b="1" i="0" dirty="0">
+                <a:solidFill>
+                  <a:srgbClr val="F7F3EA"/>
+                </a:solidFill>
+                <a:latin typeface="Aptos Display"/>
+              </a:rPr>
+              <a:t> </a:t>
+            </a:r>
+            <a:r>
+              <a:rPr sz="1700" b="1" i="0" dirty="0" err="1">
+                <a:solidFill>
+                  <a:srgbClr val="F7F3EA"/>
+                </a:solidFill>
+                <a:latin typeface="Aptos Display"/>
+              </a:rPr>
+              <a:t>да</a:t>
+            </a:r>
+            <a:r>
+              <a:rPr sz="1700" b="1" i="0" dirty="0">
+                <a:solidFill>
+                  <a:srgbClr val="F7F3EA"/>
+                </a:solidFill>
+                <a:latin typeface="Aptos Display"/>
+              </a:rPr>
+              <a:t> </a:t>
+            </a:r>
+            <a:r>
+              <a:rPr sz="1700" b="1" i="0" dirty="0" err="1">
+                <a:solidFill>
+                  <a:srgbClr val="F7F3EA"/>
+                </a:solidFill>
+                <a:latin typeface="Aptos Display"/>
+              </a:rPr>
+              <a:t>мислите</a:t>
+            </a:r>
+            <a:r>
+              <a:rPr sz="1700" b="1" i="0" dirty="0">
+                <a:solidFill>
+                  <a:srgbClr val="F7F3EA"/>
+                </a:solidFill>
+                <a:latin typeface="Aptos Display"/>
+              </a:rPr>
+              <a:t> </a:t>
+            </a:r>
+            <a:r>
+              <a:rPr sz="1700" b="1" i="0" dirty="0" err="1">
+                <a:solidFill>
+                  <a:srgbClr val="F7F3EA"/>
+                </a:solidFill>
+                <a:latin typeface="Aptos Display"/>
+              </a:rPr>
+              <a:t>като</a:t>
+            </a:r>
+            <a:r>
+              <a:rPr sz="1700" b="1" i="0" dirty="0">
+                <a:solidFill>
+                  <a:srgbClr val="F7F3EA"/>
+                </a:solidFill>
+                <a:latin typeface="Aptos Display"/>
+              </a:rPr>
+              <a:t> </a:t>
+            </a:r>
+            <a:r>
+              <a:rPr sz="1700" b="1" i="0" dirty="0" err="1">
+                <a:solidFill>
+                  <a:srgbClr val="F7F3EA"/>
+                </a:solidFill>
+                <a:latin typeface="Aptos Display"/>
+              </a:rPr>
+              <a:t>инженери</a:t>
+            </a:r>
+            <a:r>
+              <a:rPr sz="1700" b="1" i="0" dirty="0">
+                <a:solidFill>
+                  <a:srgbClr val="F7F3EA"/>
+                </a:solidFill>
+                <a:latin typeface="Aptos Display"/>
+              </a:rPr>
+              <a:t>, </a:t>
+            </a:r>
+            <a:r>
+              <a:rPr sz="1700" b="1" i="0" dirty="0" err="1">
+                <a:solidFill>
+                  <a:srgbClr val="F7F3EA"/>
+                </a:solidFill>
+                <a:latin typeface="Aptos Display"/>
+              </a:rPr>
+              <a:t>не</a:t>
+            </a:r>
+            <a:r>
+              <a:rPr sz="1700" b="1" i="0" dirty="0">
+                <a:solidFill>
+                  <a:srgbClr val="F7F3EA"/>
+                </a:solidFill>
+                <a:latin typeface="Aptos Display"/>
+              </a:rPr>
+              <a:t> </a:t>
+            </a:r>
+            <a:r>
+              <a:rPr sz="1700" b="1" i="0" dirty="0" err="1">
+                <a:solidFill>
+                  <a:srgbClr val="F7F3EA"/>
+                </a:solidFill>
+                <a:latin typeface="Aptos Display"/>
+              </a:rPr>
+              <a:t>само</a:t>
+            </a:r>
+            <a:r>
+              <a:rPr sz="1700" b="1" i="0" dirty="0">
+                <a:solidFill>
+                  <a:srgbClr val="F7F3EA"/>
+                </a:solidFill>
+                <a:latin typeface="Aptos Display"/>
+              </a:rPr>
+              <a:t> </a:t>
+            </a:r>
+            <a:r>
+              <a:rPr sz="1700" b="1" i="0" dirty="0" err="1">
+                <a:solidFill>
+                  <a:srgbClr val="F7F3EA"/>
+                </a:solidFill>
+                <a:latin typeface="Aptos Display"/>
+              </a:rPr>
+              <a:t>да</a:t>
+            </a:r>
+            <a:r>
+              <a:rPr sz="1700" b="1" i="0" dirty="0">
+                <a:solidFill>
+                  <a:srgbClr val="F7F3EA"/>
+                </a:solidFill>
+                <a:latin typeface="Aptos Display"/>
+              </a:rPr>
+              <a:t> </a:t>
+            </a:r>
+            <a:r>
+              <a:rPr sz="1700" b="1" i="0" dirty="0" err="1">
+                <a:solidFill>
+                  <a:srgbClr val="F7F3EA"/>
+                </a:solidFill>
+                <a:latin typeface="Aptos Display"/>
+              </a:rPr>
+              <a:t>пишете</a:t>
+            </a:r>
+            <a:r>
+              <a:rPr sz="1700" b="1" i="0" dirty="0">
+                <a:solidFill>
+                  <a:srgbClr val="F7F3EA"/>
+                </a:solidFill>
+                <a:latin typeface="Aptos Display"/>
+              </a:rPr>
+              <a:t> </a:t>
+            </a:r>
+            <a:r>
+              <a:rPr sz="1700" b="1" i="0" dirty="0" err="1">
+                <a:solidFill>
+                  <a:srgbClr val="F7F3EA"/>
+                </a:solidFill>
+                <a:latin typeface="Aptos Display"/>
+              </a:rPr>
+              <a:t>код</a:t>
+            </a:r>
+            <a:r>
+              <a:rPr sz="1700" b="1" i="0" dirty="0">
+                <a:solidFill>
+                  <a:srgbClr val="F7F3EA"/>
+                </a:solidFill>
+                <a:latin typeface="Aptos Display"/>
+              </a:rPr>
+              <a:t>.</a:t>
             </a:r>
           </a:p>
         </p:txBody>
@@ -27096,13 +27690,76 @@
               </a:spcAft>
             </a:pPr>
             <a:r>
-              <a:rPr sz="1420" b="1" i="0">
+              <a:rPr sz="1420" b="1" i="0" dirty="0" err="1">
                 <a:solidFill>
                   <a:srgbClr val="F7F3EA"/>
                 </a:solidFill>
                 <a:latin typeface="Aptos Display"/>
               </a:rPr>
-              <a:t>Ще обясняваме решенията и компромисите.</a:t>
+              <a:t>Ще</a:t>
+            </a:r>
+            <a:r>
+              <a:rPr sz="1420" b="1" i="0" dirty="0">
+                <a:solidFill>
+                  <a:srgbClr val="F7F3EA"/>
+                </a:solidFill>
+                <a:latin typeface="Aptos Display"/>
+              </a:rPr>
+              <a:t> </a:t>
+            </a:r>
+            <a:r>
+              <a:rPr sz="1420" b="1" i="0" dirty="0" err="1">
+                <a:solidFill>
+                  <a:srgbClr val="F7F3EA"/>
+                </a:solidFill>
+                <a:latin typeface="Aptos Display"/>
+              </a:rPr>
+              <a:t>обясняваме</a:t>
+            </a:r>
+            <a:r>
+              <a:rPr sz="1420" b="1" i="0" dirty="0">
+                <a:solidFill>
+                  <a:srgbClr val="F7F3EA"/>
+                </a:solidFill>
+                <a:latin typeface="Aptos Display"/>
+              </a:rPr>
+              <a:t> </a:t>
+            </a:r>
+            <a:r>
+              <a:rPr sz="1420" b="1" i="0" dirty="0" err="1">
+                <a:solidFill>
+                  <a:srgbClr val="F7F3EA"/>
+                </a:solidFill>
+                <a:latin typeface="Aptos Display"/>
+              </a:rPr>
+              <a:t>решенията</a:t>
+            </a:r>
+            <a:r>
+              <a:rPr sz="1420" b="1" i="0" dirty="0">
+                <a:solidFill>
+                  <a:srgbClr val="F7F3EA"/>
+                </a:solidFill>
+                <a:latin typeface="Aptos Display"/>
+              </a:rPr>
+              <a:t> и </a:t>
+            </a:r>
+            <a:r>
+              <a:rPr sz="1420" b="1" i="0" dirty="0" err="1">
+                <a:solidFill>
+                  <a:srgbClr val="F7F3EA"/>
+                </a:solidFill>
+                <a:latin typeface="Aptos Display"/>
+              </a:rPr>
+              <a:t>компромисите</a:t>
+            </a:r>
+            <a:r>
+              <a:rPr sz="1420" b="1" i="0" dirty="0">
+                <a:solidFill>
+                  <a:srgbClr val="F7F3EA"/>
+                </a:solidFill>
+                <a:latin typeface="Aptos Display"/>
+              </a:rPr>
+              <a:t>.</a:t>
             </a:r>
           </a:p>
         </p:txBody>
@@ -27268,13 +27925,130 @@
               </a:spcAft>
             </a:pPr>
             <a:r>
-              <a:rPr sz="1420" b="1" i="0">
+              <a:rPr sz="1420" b="1" i="0" dirty="0" err="1">
                 <a:solidFill>
                   <a:srgbClr val="F7F3EA"/>
                 </a:solidFill>
                 <a:latin typeface="Aptos Display"/>
               </a:rPr>
-              <a:t>Ще учим през реална работа по проекта.</a:t>
+              <a:t>Ще</a:t>
+            </a:r>
+            <a:r>
+              <a:rPr sz="1420" b="1" i="0" dirty="0">
+                <a:solidFill>
+                  <a:srgbClr val="F7F3EA"/>
+                </a:solidFill>
+                <a:latin typeface="Aptos Display"/>
+              </a:rPr>
+              <a:t> </a:t>
+            </a:r>
+            <a:r>
+              <a:rPr sz="1420" b="1" i="0" dirty="0" err="1">
+                <a:solidFill>
+                  <a:srgbClr val="F7F3EA"/>
+                </a:solidFill>
+                <a:latin typeface="Aptos Display"/>
+              </a:rPr>
+              <a:t>учим</a:t>
+            </a:r>
+            <a:r>
+              <a:rPr sz="1420" b="1" i="0" dirty="0">
+                <a:solidFill>
+                  <a:srgbClr val="F7F3EA"/>
+                </a:solidFill>
+                <a:latin typeface="Aptos Display"/>
+              </a:rPr>
+              <a:t> </a:t>
+            </a:r>
+            <a:r>
+              <a:rPr sz="1420" b="1" i="0" dirty="0" err="1">
+                <a:solidFill>
+                  <a:srgbClr val="F7F3EA"/>
+                </a:solidFill>
+                <a:latin typeface="Aptos Display"/>
+              </a:rPr>
+              <a:t>през</a:t>
+            </a:r>
+            <a:r>
+              <a:rPr sz="1420" b="1" i="0" dirty="0">
+                <a:solidFill>
+                  <a:srgbClr val="F7F3EA"/>
+                </a:solidFill>
+                <a:latin typeface="Aptos Display"/>
+              </a:rPr>
+              <a:t> </a:t>
+            </a:r>
+            <a:r>
+              <a:rPr sz="1420" b="1" i="0" dirty="0" err="1">
+                <a:solidFill>
+                  <a:srgbClr val="F7F3EA"/>
+                </a:solidFill>
+                <a:latin typeface="Aptos Display"/>
+              </a:rPr>
+              <a:t>реална</a:t>
+            </a:r>
+            <a:r>
+              <a:rPr sz="1420" b="1" i="0" dirty="0">
+                <a:solidFill>
+                  <a:srgbClr val="F7F3EA"/>
+                </a:solidFill>
+                <a:latin typeface="Aptos Display"/>
+              </a:rPr>
+              <a:t> </a:t>
+            </a:r>
+            <a:r>
+              <a:rPr sz="1420" b="1" i="0" dirty="0" err="1">
+                <a:solidFill>
+                  <a:srgbClr val="F7F3EA"/>
+                </a:solidFill>
+                <a:latin typeface="Aptos Display"/>
+              </a:rPr>
+              <a:t>работа</a:t>
+            </a:r>
+            <a:r>
+              <a:rPr sz="1420" b="1" i="0" dirty="0">
+                <a:solidFill>
+                  <a:srgbClr val="F7F3EA"/>
+                </a:solidFill>
+                <a:latin typeface="Aptos Display"/>
+              </a:rPr>
+              <a:t> </a:t>
+            </a:r>
+            <a:r>
+              <a:rPr sz="1420" b="1" i="0" dirty="0" err="1">
+                <a:solidFill>
+                  <a:srgbClr val="F7F3EA"/>
+                </a:solidFill>
+                <a:latin typeface="Aptos Display"/>
+              </a:rPr>
+              <a:t>по</a:t>
+            </a:r>
+            <a:r>
+              <a:rPr sz="1420" b="1" i="0" dirty="0">
+                <a:solidFill>
+                  <a:srgbClr val="F7F3EA"/>
+                </a:solidFill>
+                <a:latin typeface="Aptos Display"/>
+              </a:rPr>
+              <a:t> </a:t>
+            </a:r>
+            <a:r>
+              <a:rPr sz="1420" b="1" i="0" dirty="0" err="1">
+                <a:solidFill>
+                  <a:srgbClr val="F7F3EA"/>
+                </a:solidFill>
+                <a:latin typeface="Aptos Display"/>
+              </a:rPr>
+              <a:t>проекта</a:t>
+            </a:r>
+            <a:r>
+              <a:rPr sz="1420" b="1" i="0" dirty="0">
+                <a:solidFill>
+                  <a:srgbClr val="F7F3EA"/>
+                </a:solidFill>
+                <a:latin typeface="Aptos Display"/>
+              </a:rPr>
+              <a:t>.</a:t>
             </a:r>
           </a:p>
         </p:txBody>
@@ -27440,13 +28214,94 @@
               </a:spcAft>
             </a:pPr>
             <a:r>
-              <a:rPr sz="1420" b="1" i="0">
+              <a:rPr sz="1420" b="1" i="0" dirty="0" err="1">
                 <a:solidFill>
                   <a:srgbClr val="F7F3EA"/>
                 </a:solidFill>
                 <a:latin typeface="Aptos Display"/>
               </a:rPr>
-              <a:t>Въпросите и несъгласието са добре дошли.</a:t>
+              <a:t>Въпросите</a:t>
+            </a:r>
+            <a:r>
+              <a:rPr sz="1420" b="1" i="0" dirty="0">
+                <a:solidFill>
+                  <a:srgbClr val="F7F3EA"/>
+                </a:solidFill>
+                <a:latin typeface="Aptos Display"/>
+              </a:rPr>
+              <a:t> и </a:t>
+            </a:r>
+            <a:r>
+              <a:rPr sz="1420" b="1" i="0" dirty="0" err="1">
+                <a:solidFill>
+                  <a:srgbClr val="F7F3EA"/>
+                </a:solidFill>
+                <a:latin typeface="Aptos Display"/>
+              </a:rPr>
+              <a:t>несъгласието</a:t>
+            </a:r>
+            <a:r>
+              <a:rPr sz="1420" b="1" i="0" dirty="0">
+                <a:solidFill>
+                  <a:srgbClr val="F7F3EA"/>
+                </a:solidFill>
+                <a:latin typeface="Aptos Display"/>
+              </a:rPr>
+              <a:t> </a:t>
+            </a:r>
+            <a:r>
+              <a:rPr sz="1420" b="1" i="0" dirty="0" err="1">
+                <a:solidFill>
+                  <a:srgbClr val="F7F3EA"/>
+                </a:solidFill>
+                <a:latin typeface="Aptos Display"/>
+              </a:rPr>
+              <a:t>са</a:t>
+            </a:r>
+            <a:r>
+              <a:rPr sz="1420" b="1" i="0" dirty="0">
+                <a:solidFill>
+                  <a:srgbClr val="F7F3EA"/>
+                </a:solidFill>
+                <a:latin typeface="Aptos Display"/>
+              </a:rPr>
+              <a:t> </a:t>
+            </a:r>
+            <a:r>
+              <a:rPr sz="1420" b="1" i="0" dirty="0" err="1">
+                <a:solidFill>
+                  <a:srgbClr val="F7F3EA"/>
+                </a:solidFill>
+                <a:latin typeface="Aptos Display"/>
+              </a:rPr>
+              <a:t>добре</a:t>
+            </a:r>
+            <a:r>
+              <a:rPr sz="1420" b="1" i="0" dirty="0">
+                <a:solidFill>
+                  <a:srgbClr val="F7F3EA"/>
+                </a:solidFill>
+                <a:latin typeface="Aptos Display"/>
+              </a:rPr>
+              <a:t> </a:t>
+            </a:r>
+            <a:r>
+              <a:rPr sz="1420" b="1" i="0" dirty="0" err="1">
+                <a:solidFill>
+                  <a:srgbClr val="F7F3EA"/>
+                </a:solidFill>
+                <a:latin typeface="Aptos Display"/>
+              </a:rPr>
+              <a:t>дошли</a:t>
+            </a:r>
+            <a:r>
+              <a:rPr sz="1420" b="1" i="0" dirty="0">
+                <a:solidFill>
+                  <a:srgbClr val="F7F3EA"/>
+                </a:solidFill>
+                <a:latin typeface="Aptos Display"/>
+              </a:rPr>
+              <a:t>.</a:t>
             </a:r>
           </a:p>
         </p:txBody>
@@ -36344,13 +37199,76 @@
               </a:spcAft>
             </a:pPr>
             <a:r>
-              <a:rPr sz="1220" b="0" i="0">
+              <a:rPr sz="1220" b="0" i="0" dirty="0" err="1">
                 <a:solidFill>
                   <a:srgbClr val="F7F3EA"/>
                 </a:solidFill>
                 <a:latin typeface="Cascadia Mono"/>
               </a:rPr>
-              <a:t>Обясни пътя на GET /api/movies.</a:t>
+              <a:t>Обясни</a:t>
+            </a:r>
+            <a:r>
+              <a:rPr sz="1220" b="0" i="0" dirty="0">
+                <a:solidFill>
+                  <a:srgbClr val="F7F3EA"/>
+                </a:solidFill>
+                <a:latin typeface="Cascadia Mono"/>
+              </a:rPr>
+              <a:t> </a:t>
+            </a:r>
+            <a:r>
+              <a:rPr sz="1220" b="0" i="0" dirty="0" err="1">
+                <a:solidFill>
+                  <a:srgbClr val="F7F3EA"/>
+                </a:solidFill>
+                <a:latin typeface="Cascadia Mono"/>
+              </a:rPr>
+              <a:t>пътя</a:t>
+            </a:r>
+            <a:r>
+              <a:rPr sz="1220" b="0" i="0" dirty="0">
+                <a:solidFill>
+                  <a:srgbClr val="F7F3EA"/>
+                </a:solidFill>
+                <a:latin typeface="Cascadia Mono"/>
+              </a:rPr>
+              <a:t> </a:t>
+            </a:r>
+            <a:r>
+              <a:rPr sz="1220" b="0" i="0" dirty="0" err="1">
+                <a:solidFill>
+                  <a:srgbClr val="F7F3EA"/>
+                </a:solidFill>
+                <a:latin typeface="Cascadia Mono"/>
+              </a:rPr>
+              <a:t>на</a:t>
+            </a:r>
+            <a:r>
+              <a:rPr sz="1220" b="0" i="0" dirty="0">
+                <a:solidFill>
+                  <a:srgbClr val="F7F3EA"/>
+                </a:solidFill>
+                <a:latin typeface="Cascadia Mono"/>
+              </a:rPr>
+              <a:t> GET /</a:t>
+            </a:r>
+            <a:r>
+              <a:rPr sz="1220" b="0" i="0" dirty="0" err="1">
+                <a:solidFill>
+                  <a:srgbClr val="F7F3EA"/>
+                </a:solidFill>
+                <a:latin typeface="Cascadia Mono"/>
+              </a:rPr>
+              <a:t>api</a:t>
+            </a:r>
+            <a:r>
+              <a:rPr sz="1220" b="0" i="0" dirty="0">
+                <a:solidFill>
+                  <a:srgbClr val="F7F3EA"/>
+                </a:solidFill>
+                <a:latin typeface="Cascadia Mono"/>
+              </a:rPr>
+              <a:t>/movies.</a:t>
             </a:r>
           </a:p>
         </p:txBody>
@@ -43134,7 +44052,7 @@
         <p:spPr>
           <a:xfrm>
             <a:off x="7114031" y="3273552"/>
-            <a:ext cx="2468880" cy="219456"/>
+            <a:ext cx="2468880" cy="323165"/>
           </a:xfrm>
           <a:prstGeom prst="rect">
             <a:avLst/>
@@ -43153,14 +44071,29 @@
               </a:spcAft>
             </a:pPr>
             <a:r>
-              <a:rPr sz="1050" b="1" i="0">
+              <a:rPr sz="1050" b="1" i="0" dirty="0">
                 <a:solidFill>
                   <a:srgbClr val="F4C95D"/>
                 </a:solidFill>
                 <a:latin typeface="Cascadia Mono"/>
               </a:rPr>
-              <a:t>ВСЕКИ СТАРТИРА</a:t>
-            </a:r>
+              <a:t>ВСЕКИ </a:t>
+            </a:r>
+            <a:r>
+              <a:rPr lang="bg-BG" sz="1050" b="1" i="0" dirty="0">
+                <a:solidFill>
+                  <a:srgbClr val="F4C95D"/>
+                </a:solidFill>
+                <a:latin typeface="Cascadia Mono"/>
+              </a:rPr>
+              <a:t>ДА ГО КАЧИ НА СОБСТВЕНОТО РЕПО</a:t>
+            </a:r>
+            <a:endParaRPr sz="1050" b="1" i="0" dirty="0">
+              <a:solidFill>
+                <a:srgbClr val="F4C95D"/>
+              </a:solidFill>
+              <a:latin typeface="Cascadia Mono"/>
+            </a:endParaRPr>
           </a:p>
         </p:txBody>
       </p:sp>
@@ -43173,7 +44106,7 @@
         <p:spPr>
           <a:xfrm>
             <a:off x="7114031" y="3621024"/>
-            <a:ext cx="3895344" cy="310896"/>
+            <a:ext cx="3895344" cy="218521"/>
           </a:xfrm>
           <a:prstGeom prst="rect">
             <a:avLst/>
@@ -43192,14 +44125,29 @@
               </a:spcAft>
             </a:pPr>
             <a:r>
-              <a:rPr sz="1420" b="1" i="0">
+              <a:rPr sz="1420" b="1" i="0" dirty="0">
                 <a:solidFill>
                   <a:srgbClr val="F7F3EA"/>
                 </a:solidFill>
                 <a:latin typeface="Aptos Display"/>
               </a:rPr>
-              <a:t>Clone, restore, build, test, run</a:t>
-            </a:r>
+              <a:t> restore, build, test, </a:t>
+            </a:r>
+            <a:r>
+              <a:rPr lang="en-US" sz="1420" b="1" dirty="0">
+                <a:solidFill>
+                  <a:srgbClr val="F7F3EA"/>
+                </a:solidFill>
+                <a:latin typeface="Aptos Display"/>
+              </a:rPr>
+              <a:t>push</a:t>
+            </a:r>
+            <a:endParaRPr sz="1420" b="1" i="0" dirty="0">
+              <a:solidFill>
+                <a:srgbClr val="F7F3EA"/>
+              </a:solidFill>
+              <a:latin typeface="Aptos Display"/>
+            </a:endParaRPr>
           </a:p>
         </p:txBody>
       </p:sp>
@@ -43343,7 +44291,7 @@
         <p:spPr>
           <a:xfrm>
             <a:off x="1609344" y="4617720"/>
-            <a:ext cx="2468880" cy="219456"/>
+            <a:ext cx="2395728" cy="161583"/>
           </a:xfrm>
           <a:prstGeom prst="rect">
             <a:avLst/>
@@ -43571,7 +44519,7 @@
               </a:spcAft>
             </a:pPr>
             <a:r>
-              <a:rPr sz="1050" b="1" i="0">
+              <a:rPr sz="1050" b="1" i="0" dirty="0">
                 <a:solidFill>
                   <a:srgbClr val="8DD694"/>
                 </a:solidFill>
@@ -43610,14 +44558,74 @@
               </a:spcAft>
             </a:pPr>
             <a:r>
-              <a:rPr sz="1420" b="1" i="0">
+              <a:rPr sz="1420" b="1" i="0" dirty="0" err="1">
                 <a:solidFill>
                   <a:srgbClr val="F7F3EA"/>
                 </a:solidFill>
                 <a:latin typeface="Aptos Display"/>
               </a:rPr>
-              <a:t>Вашите очаквания, цели и въпроси</a:t>
-            </a:r>
+              <a:t>Вашите</a:t>
+            </a:r>
+            <a:r>
+              <a:rPr sz="1420" b="1" i="0" dirty="0">
+                <a:solidFill>
+                  <a:srgbClr val="F7F3EA"/>
+                </a:solidFill>
+                <a:latin typeface="Aptos Display"/>
+              </a:rPr>
+              <a:t> </a:t>
+            </a:r>
+            <a:r>
+              <a:rPr sz="1420" b="1" i="0" dirty="0" err="1">
+                <a:solidFill>
+                  <a:srgbClr val="F7F3EA"/>
+                </a:solidFill>
+                <a:latin typeface="Aptos Display"/>
+              </a:rPr>
+              <a:t>очаквания</a:t>
+            </a:r>
+            <a:r>
+              <a:rPr sz="1420" b="1" i="0" dirty="0">
+                <a:solidFill>
+                  <a:srgbClr val="F7F3EA"/>
+                </a:solidFill>
+                <a:latin typeface="Aptos Display"/>
+              </a:rPr>
+              <a:t>, </a:t>
+            </a:r>
+            <a:r>
+              <a:rPr sz="1420" b="1" i="0" dirty="0" err="1">
+                <a:solidFill>
+                  <a:srgbClr val="F7F3EA"/>
+                </a:solidFill>
+                <a:latin typeface="Aptos Display"/>
+              </a:rPr>
+              <a:t>цели</a:t>
+            </a:r>
+            <a:r>
+              <a:rPr sz="1420" b="1" i="0" dirty="0">
+                <a:solidFill>
+                  <a:srgbClr val="F7F3EA"/>
+                </a:solidFill>
+                <a:latin typeface="Aptos Display"/>
+              </a:rPr>
+              <a:t> и </a:t>
+            </a:r>
+            <a:r>
+              <a:rPr sz="1420" b="1" i="0" dirty="0" err="1">
+                <a:solidFill>
+                  <a:srgbClr val="F7F3EA"/>
+                </a:solidFill>
+                <a:latin typeface="Aptos Display"/>
+              </a:rPr>
+              <a:t>въпроси</a:t>
+            </a:r>
+            <a:endParaRPr sz="1420" b="1" i="0" dirty="0">
+              <a:solidFill>
+                <a:srgbClr val="F7F3EA"/>
+              </a:solidFill>
+              <a:latin typeface="Aptos Display"/>
+            </a:endParaRPr>
           </a:p>
         </p:txBody>
       </p:sp>
@@ -47611,7 +48619,7 @@
               </a:spcAft>
             </a:pPr>
             <a:r>
-              <a:rPr sz="1600" b="1" i="0">
+              <a:rPr sz="1600" b="1" i="0" dirty="0">
                 <a:solidFill>
                   <a:srgbClr val="F7F3EA"/>
                 </a:solidFill>
@@ -53185,13 +54193,112 @@
               </a:spcAft>
             </a:pPr>
             <a:r>
-              <a:rPr sz="1450" b="0" i="0">
+              <a:rPr sz="1450" b="0" i="0" dirty="0" err="1">
                 <a:solidFill>
                   <a:srgbClr val="A9B5C7"/>
                 </a:solidFill>
                 <a:latin typeface="Aptos"/>
               </a:rPr>
-              <a:t>Малки endpoints, явни зависимости и без излишна controller церемония.</a:t>
+              <a:t>Малки</a:t>
+            </a:r>
+            <a:r>
+              <a:rPr sz="1450" b="0" i="0" dirty="0">
+                <a:solidFill>
+                  <a:srgbClr val="A9B5C7"/>
+                </a:solidFill>
+                <a:latin typeface="Aptos"/>
+              </a:rPr>
+              <a:t> endpoints, </a:t>
+            </a:r>
+            <a:r>
+              <a:rPr sz="1450" b="0" i="0" dirty="0" err="1">
+                <a:solidFill>
+                  <a:srgbClr val="A9B5C7"/>
+                </a:solidFill>
+                <a:latin typeface="Aptos"/>
+              </a:rPr>
+              <a:t>явни</a:t>
+            </a:r>
+            <a:r>
+              <a:rPr sz="1450" b="0" i="0" dirty="0">
+                <a:solidFill>
+                  <a:srgbClr val="A9B5C7"/>
+                </a:solidFill>
+                <a:latin typeface="Aptos"/>
+              </a:rPr>
+              <a:t> </a:t>
+            </a:r>
+            <a:r>
+              <a:rPr sz="1450" b="0" i="0" dirty="0" err="1">
+                <a:solidFill>
+                  <a:srgbClr val="A9B5C7"/>
+                </a:solidFill>
+                <a:latin typeface="Aptos"/>
+              </a:rPr>
+              <a:t>зависимости</a:t>
+            </a:r>
+            <a:r>
+              <a:rPr sz="1450" b="0" i="0" dirty="0">
+                <a:solidFill>
+                  <a:srgbClr val="A9B5C7"/>
+                </a:solidFill>
+                <a:latin typeface="Aptos"/>
+              </a:rPr>
+              <a:t> и </a:t>
+            </a:r>
+            <a:r>
+              <a:rPr sz="1450" b="0" i="0" dirty="0" err="1">
+                <a:solidFill>
+                  <a:srgbClr val="A9B5C7"/>
+                </a:solidFill>
+                <a:latin typeface="Aptos"/>
+              </a:rPr>
+              <a:t>без</a:t>
+            </a:r>
+            <a:r>
+              <a:rPr sz="1450" b="0" i="0" dirty="0">
+                <a:solidFill>
+                  <a:srgbClr val="A9B5C7"/>
+                </a:solidFill>
+                <a:latin typeface="Aptos"/>
+              </a:rPr>
+              <a:t> </a:t>
+            </a:r>
+            <a:r>
+              <a:rPr sz="1450" b="0" i="0" dirty="0" err="1">
+                <a:solidFill>
+                  <a:srgbClr val="A9B5C7"/>
+                </a:solidFill>
+                <a:latin typeface="Aptos"/>
+              </a:rPr>
+              <a:t>излишна</a:t>
+            </a:r>
+            <a:r>
+              <a:rPr sz="1450" b="0" i="0" dirty="0">
+                <a:solidFill>
+                  <a:srgbClr val="A9B5C7"/>
+                </a:solidFill>
+                <a:latin typeface="Aptos"/>
+              </a:rPr>
+              <a:t> controller </a:t>
+            </a:r>
+            <a:r>
+              <a:rPr sz="1450" b="0" i="0" dirty="0" err="1">
+                <a:solidFill>
+                  <a:srgbClr val="A9B5C7"/>
+                </a:solidFill>
+                <a:latin typeface="Aptos"/>
+              </a:rPr>
+              <a:t>церемония</a:t>
+            </a:r>
+            <a:r>
+              <a:rPr sz="1450" b="0" i="0" dirty="0">
+                <a:solidFill>
+                  <a:srgbClr val="A9B5C7"/>
+                </a:solidFill>
+                <a:latin typeface="Aptos"/>
+              </a:rPr>
+              <a:t>.</a:t>
             </a:r>
           </a:p>
         </p:txBody>
@@ -56475,44 +57582,44 @@
         <a:sysClr val="window" lastClr="FFFFFF"/>
       </a:lt1>
       <a:dk2>
-        <a:srgbClr val="1F497D"/>
+        <a:srgbClr val="0E2841"/>
       </a:dk2>
       <a:lt2>
-        <a:srgbClr val="EEECE1"/>
+        <a:srgbClr val="E8E8E8"/>
       </a:lt2>
       <a:accent1>
-        <a:srgbClr val="4F81BD"/>
+        <a:srgbClr val="156082"/>
       </a:accent1>
       <a:accent2>
-        <a:srgbClr val="C0504D"/>
+        <a:srgbClr val="E97132"/>
       </a:accent2>
       <a:accent3>
-        <a:srgbClr val="9BBB59"/>
+        <a:srgbClr val="196B24"/>
       </a:accent3>
       <a:accent4>
-        <a:srgbClr val="8064A2"/>
+        <a:srgbClr val="0F9ED5"/>
       </a:accent4>
       <a:accent5>
-        <a:srgbClr val="4BACC6"/>
+        <a:srgbClr val="A02B93"/>
       </a:accent5>
       <a:accent6>
-        <a:srgbClr val="F79646"/>
+        <a:srgbClr val="4EA72E"/>
       </a:accent6>
       <a:hlink>
-        <a:srgbClr val="0000FF"/>
+        <a:srgbClr val="467886"/>
       </a:hlink>
       <a:folHlink>
-        <a:srgbClr val="800080"/>
+        <a:srgbClr val="96607D"/>
       </a:folHlink>
     </a:clrScheme>
     <a:fontScheme name="Office">
       <a:majorFont>
-        <a:latin typeface="Calibri"/>
+        <a:latin typeface="Aptos Display" panose="02110004020202020204"/>
         <a:ea typeface=""/>
         <a:cs typeface=""/>
-        <a:font script="Jpan" typeface="ＭＳ Ｐゴシック"/>
+        <a:font script="Jpan" typeface="游ゴシック Light"/>
         <a:font script="Hang" typeface="맑은 고딕"/>
-        <a:font script="Hans" typeface="宋体"/>
+        <a:font script="Hans" typeface="等线 Light"/>
         <a:font script="Hant" typeface="新細明體"/>
         <a:font script="Arab" typeface="Times New Roman"/>
         <a:font script="Hebr" typeface="Times New Roman"/>
@@ -56540,14 +57647,31 @@
         <a:font script="Viet" typeface="Times New Roman"/>
         <a:font script="Uigh" typeface="Microsoft Uighur"/>
         <a:font script="Geor" typeface="Sylfaen"/>
+        <a:font script="Armn" typeface="Arial"/>
+        <a:font script="Bugi" typeface="Leelawadee UI"/>
+        <a:font script="Bopo" typeface="Microsoft JhengHei"/>
+        <a:font script="Java" typeface="Javanese Text"/>
+        <a:font script="Lisu" typeface="Segoe UI"/>
+        <a:font script="Mymr" typeface="Myanmar Text"/>
+        <a:font script="Nkoo" typeface="Ebrima"/>
+        <a:font script="Olck" typeface="Nirmala UI"/>
+        <a:font script="Osma" typeface="Ebrima"/>
+        <a:font script="Phag" typeface="Phagspa"/>
+        <a:font script="Syrn" typeface="Estrangelo Edessa"/>
+        <a:font script="Syrj" typeface="Estrangelo Edessa"/>
+        <a:font script="Syre" typeface="Estrangelo Edessa"/>
+        <a:font script="Sora" typeface="Nirmala UI"/>
+        <a:font script="Tale" typeface="Microsoft Tai Le"/>
+        <a:font script="Talu" typeface="Microsoft New Tai Lue"/>
+        <a:font script="Tfng" typeface="Ebrima"/>
       </a:majorFont>
       <a:minorFont>
-        <a:latin typeface="Calibri"/>
+        <a:latin typeface="Aptos" panose="02110004020202020204"/>
         <a:ea typeface=""/>
         <a:cs typeface=""/>
-        <a:font script="Jpan" typeface="ＭＳ Ｐゴシック"/>
+        <a:font script="Jpan" typeface="游ゴシック"/>
         <a:font script="Hang" typeface="맑은 고딕"/>
-        <a:font script="Hans" typeface="宋体"/>
+        <a:font script="Hans" typeface="等线"/>
         <a:font script="Hant" typeface="新細明體"/>
         <a:font script="Arab" typeface="Arial"/>
         <a:font script="Hebr" typeface="Arial"/>
@@ -56575,6 +57699,23 @@
         <a:font script="Viet" typeface="Arial"/>
         <a:font script="Uigh" typeface="Microsoft Uighur"/>
         <a:font script="Geor" typeface="Sylfaen"/>
+        <a:font script="Armn" typeface="Arial"/>
+        <a:font script="Bugi" typeface="Leelawadee UI"/>
+        <a:font script="Bopo" typeface="Microsoft JhengHei"/>
+        <a:font script="Java" typeface="Javanese Text"/>
+        <a:font script="Lisu" typeface="Segoe UI"/>
+        <a:font script="Mymr" typeface="Myanmar Text"/>
+        <a:font script="Nkoo" typeface="Ebrima"/>
+        <a:font script="Olck" typeface="Nirmala UI"/>
+        <a:font script="Osma" typeface="Ebrima"/>
+        <a:font script="Phag" typeface="Phagspa"/>
+        <a:font script="Syrn" typeface="Estrangelo Edessa"/>
+        <a:font script="Syrj" typeface="Estrangelo Edessa"/>
+        <a:font script="Syre" typeface="Estrangelo Edessa"/>
+        <a:font script="Sora" typeface="Nirmala UI"/>
+        <a:font script="Tale" typeface="Microsoft Tai Le"/>
+        <a:font script="Talu" typeface="Microsoft New Tai Lue"/>
+        <a:font script="Tfng" typeface="Ebrima"/>
       </a:minorFont>
     </a:fontScheme>
     <a:fmtScheme name="Office">
@@ -56586,180 +57727,136 @@
           <a:gsLst>
             <a:gs pos="0">
               <a:schemeClr val="phClr">
-                <a:tint val="50000"/>
-                <a:satMod val="300000"/>
+                <a:lumMod val="110000"/>
+                <a:satMod val="105000"/>
+                <a:tint val="67000"/>
               </a:schemeClr>
             </a:gs>
-            <a:gs pos="35000">
+            <a:gs pos="50000">
               <a:schemeClr val="phClr">
-                <a:tint val="37000"/>
-                <a:satMod val="300000"/>
+                <a:lumMod val="105000"/>
+                <a:satMod val="103000"/>
+                <a:tint val="73000"/>
               </a:schemeClr>
             </a:gs>
             <a:gs pos="100000">
               <a:schemeClr val="phClr">
-                <a:tint val="15000"/>
-                <a:satMod val="350000"/>
+                <a:lumMod val="105000"/>
+                <a:satMod val="109000"/>
+                <a:tint val="81000"/>
               </a:schemeClr>
             </a:gs>
           </a:gsLst>
-          <a:lin ang="16200000" scaled="1"/>
+          <a:lin ang="5400000" scaled="0"/>
         </a:gradFill>
         <a:gradFill rotWithShape="1">
           <a:gsLst>
             <a:gs pos="0">
               <a:schemeClr val="phClr">
-                <a:tint val="100000"/>
+                <a:satMod val="103000"/>
+                <a:lumMod val="102000"/>
+                <a:tint val="94000"/>
+              </a:schemeClr>
+            </a:gs>
+            <a:gs pos="50000">
+              <a:schemeClr val="phClr">
+                <a:satMod val="110000"/>
+                <a:lumMod val="100000"/>
                 <a:shade val="100000"/>
-                <a:satMod val="130000"/>
               </a:schemeClr>
             </a:gs>
             <a:gs pos="100000">
               <a:schemeClr val="phClr">
-                <a:tint val="50000"/>
-                <a:shade val="100000"/>
-                <a:satMod val="350000"/>
+                <a:lumMod val="99000"/>
+                <a:satMod val="120000"/>
+                <a:shade val="78000"/>
               </a:schemeClr>
             </a:gs>
           </a:gsLst>
-          <a:lin ang="16200000" scaled="0"/>
+          <a:lin ang="5400000" scaled="0"/>
         </a:gradFill>
       </a:fillStyleLst>
       <a:lnStyleLst>
-        <a:ln w="9525" cap="flat" cmpd="sng" algn="ctr">
-          <a:solidFill>
-            <a:schemeClr val="phClr">
-              <a:shade val="95000"/>
-              <a:satMod val="105000"/>
-            </a:schemeClr>
+        <a:ln w="12700" cap="flat" cmpd="sng" algn="ctr">
+          <a:solidFill>
+            <a:schemeClr val="phClr"/>
           </a:solidFill>
           <a:prstDash val="solid"/>
+          <a:miter lim="800000"/>
+        </a:ln>
+        <a:ln w="19050" cap="flat" cmpd="sng" algn="ctr">
+          <a:solidFill>
+            <a:schemeClr val="phClr"/>
+          </a:solidFill>
+          <a:prstDash val="solid"/>
+          <a:miter lim="800000"/>
         </a:ln>
         <a:ln w="25400" cap="flat" cmpd="sng" algn="ctr">
           <a:solidFill>
             <a:schemeClr val="phClr"/>
           </a:solidFill>
           <a:prstDash val="solid"/>
-        </a:ln>
-        <a:ln w="38100" cap="flat" cmpd="sng" algn="ctr">
-          <a:solidFill>
-            <a:schemeClr val="phClr"/>
-          </a:solidFill>
-          <a:prstDash val="solid"/>
+          <a:miter lim="800000"/>
         </a:ln>
       </a:lnStyleLst>
       <a:effectStyleLst>
         <a:effectStyle>
+          <a:effectLst/>
+        </a:effectStyle>
+        <a:effectStyle>
+          <a:effectLst/>
+        </a:effectStyle>
+        <a:effectStyle>
           <a:effectLst>
-            <a:outerShdw blurRad="40000" dist="20000" dir="5400000" rotWithShape="0">
+            <a:outerShdw blurRad="57150" dist="19050" dir="5400000" algn="ctr" rotWithShape="0">
               <a:srgbClr val="000000">
-                <a:alpha val="38000"/>
+                <a:alpha val="63000"/>
               </a:srgbClr>
             </a:outerShdw>
           </a:effectLst>
-        </a:effectStyle>
-        <a:effectStyle>
-          <a:effectLst>
-            <a:outerShdw blurRad="40000" dist="23000" dir="5400000" rotWithShape="0">
-              <a:srgbClr val="000000">
-                <a:alpha val="35000"/>
-              </a:srgbClr>
-            </a:outerShdw>
-          </a:effectLst>
-        </a:effectStyle>
-        <a:effectStyle>
-          <a:effectLst>
-            <a:outerShdw blurRad="40000" dist="23000" dir="5400000" rotWithShape="0">
-              <a:srgbClr val="000000">
-                <a:alpha val="35000"/>
-              </a:srgbClr>
-            </a:outerShdw>
-          </a:effectLst>
-          <a:scene3d>
-            <a:camera prst="orthographicFront">
-              <a:rot lat="0" lon="0" rev="0"/>
-            </a:camera>
-            <a:lightRig rig="threePt" dir="t">
-              <a:rot lat="0" lon="0" rev="1200000"/>
-            </a:lightRig>
-          </a:scene3d>
-          <a:sp3d>
-            <a:bevelT w="63500" h="25400"/>
-          </a:sp3d>
         </a:effectStyle>
       </a:effectStyleLst>
       <a:bgFillStyleLst>
         <a:solidFill>
           <a:schemeClr val="phClr"/>
         </a:solidFill>
+        <a:solidFill>
+          <a:schemeClr val="phClr">
+            <a:tint val="95000"/>
+            <a:satMod val="170000"/>
+          </a:schemeClr>
+        </a:solidFill>
         <a:gradFill rotWithShape="1">
           <a:gsLst>
             <a:gs pos="0">
               <a:schemeClr val="phClr">
-                <a:tint val="40000"/>
-                <a:satMod val="350000"/>
+                <a:tint val="93000"/>
+                <a:satMod val="150000"/>
+                <a:shade val="98000"/>
+                <a:lumMod val="102000"/>
               </a:schemeClr>
             </a:gs>
-            <a:gs pos="40000">
+            <a:gs pos="50000">
               <a:schemeClr val="phClr">
-                <a:tint val="45000"/>
-                <a:shade val="99000"/>
-                <a:satMod val="350000"/>
+                <a:tint val="98000"/>
+                <a:satMod val="130000"/>
+                <a:shade val="90000"/>
+                <a:lumMod val="103000"/>
               </a:schemeClr>
             </a:gs>
             <a:gs pos="100000">
               <a:schemeClr val="phClr">
-                <a:shade val="20000"/>
-                <a:satMod val="255000"/>
+                <a:shade val="63000"/>
+                <a:satMod val="120000"/>
               </a:schemeClr>
             </a:gs>
           </a:gsLst>
-          <a:path path="circle">
-            <a:fillToRect l="50000" t="-80000" r="50000" b="180000"/>
-          </a:path>
-        </a:gradFill>
-        <a:gradFill rotWithShape="1">
-          <a:gsLst>
-            <a:gs pos="0">
-              <a:schemeClr val="phClr">
-                <a:tint val="80000"/>
-                <a:satMod val="300000"/>
-              </a:schemeClr>
-            </a:gs>
-            <a:gs pos="100000">
-              <a:schemeClr val="phClr">
-                <a:shade val="30000"/>
-                <a:satMod val="200000"/>
-              </a:schemeClr>
-            </a:gs>
-          </a:gsLst>
-          <a:path path="circle">
-            <a:fillToRect l="50000" t="50000" r="50000" b="50000"/>
-          </a:path>
+          <a:lin ang="5400000" scaled="0"/>
         </a:gradFill>
       </a:bgFillStyleLst>
     </a:fmtScheme>
   </a:themeElements>
   <a:objectDefaults>
-    <a:spDef>
-      <a:spPr/>
-      <a:bodyPr/>
-      <a:lstStyle/>
-      <a:style>
-        <a:lnRef idx="1">
-          <a:schemeClr val="accent1"/>
-        </a:lnRef>
-        <a:fillRef idx="3">
-          <a:schemeClr val="accent1"/>
-        </a:fillRef>
-        <a:effectRef idx="2">
-          <a:schemeClr val="accent1"/>
-        </a:effectRef>
-        <a:fontRef idx="minor">
-          <a:schemeClr val="lt1"/>
-        </a:fontRef>
-      </a:style>
-    </a:spDef>
     <a:lnDef>
       <a:spPr/>
       <a:bodyPr/>
@@ -56781,6 +57878,11 @@
     </a:lnDef>
   </a:objectDefaults>
   <a:extraClrSchemeLst/>
+  <a:extLst>
+    <a:ext uri="{05A4C25C-085E-4340-85A3-A5531E510DB2}">
+      <thm15:themeFamily xmlns:thm15="http://schemas.microsoft.com/office/thememl/2012/main" name="Office Theme" id="{2E142A2C-CD16-42D6-873A-C26D2A0506FA}" vid="{1BDDFF52-6CD6-40A5-AB3C-68EB2F1E4D0A}"/>
+    </a:ext>
+  </a:extLst>
 </a:theme>
 </file>
 
